--- a/assets/slides/workshop_DynamicPATCH.pptx
+++ b/assets/slides/workshop_DynamicPATCH.pptx
@@ -13,8 +13,8 @@
     <p:sldId id="753" r:id="rId7"/>
     <p:sldId id="755" r:id="rId8"/>
     <p:sldId id="426" r:id="rId9"/>
-    <p:sldId id="424" r:id="rId10"/>
-    <p:sldId id="715" r:id="rId11"/>
+    <p:sldId id="760" r:id="rId10"/>
+    <p:sldId id="761" r:id="rId11"/>
     <p:sldId id="739" r:id="rId12"/>
     <p:sldId id="745" r:id="rId13"/>
     <p:sldId id="718" r:id="rId14"/>
@@ -136,18 +136,18 @@
   <pc:docChgLst>
     <pc:chgData name="Zhang, Aiyin" userId="6984d0e4-55fb-4bdb-aa49-e04b2dfb6feb" providerId="ADAL" clId="{5B75A0BE-F550-4DA7-ADD9-C5D08B16DEF0}"/>
     <pc:docChg chg="undo custSel addSld delSld modSld sldOrd">
-      <pc:chgData name="Zhang, Aiyin" userId="6984d0e4-55fb-4bdb-aa49-e04b2dfb6feb" providerId="ADAL" clId="{5B75A0BE-F550-4DA7-ADD9-C5D08B16DEF0}" dt="2026-09-30T18:01:35.973" v="728" actId="20577"/>
+      <pc:chgData name="Zhang, Aiyin" userId="6984d0e4-55fb-4bdb-aa49-e04b2dfb6feb" providerId="ADAL" clId="{5B75A0BE-F550-4DA7-ADD9-C5D08B16DEF0}" dt="2026-09-30T22:17:16.476" v="771" actId="113"/>
       <pc:docMkLst>
         <pc:docMk/>
       </pc:docMkLst>
       <pc:sldChg chg="modSp mod">
-        <pc:chgData name="Zhang, Aiyin" userId="6984d0e4-55fb-4bdb-aa49-e04b2dfb6feb" providerId="ADAL" clId="{5B75A0BE-F550-4DA7-ADD9-C5D08B16DEF0}" dt="2026-09-30T04:23:57.694" v="223" actId="20577"/>
+        <pc:chgData name="Zhang, Aiyin" userId="6984d0e4-55fb-4bdb-aa49-e04b2dfb6feb" providerId="ADAL" clId="{5B75A0BE-F550-4DA7-ADD9-C5D08B16DEF0}" dt="2026-09-30T22:17:16.476" v="771" actId="113"/>
         <pc:sldMkLst>
           <pc:docMk/>
           <pc:sldMk cId="452660045" sldId="407"/>
         </pc:sldMkLst>
         <pc:spChg chg="mod">
-          <ac:chgData name="Zhang, Aiyin" userId="6984d0e4-55fb-4bdb-aa49-e04b2dfb6feb" providerId="ADAL" clId="{5B75A0BE-F550-4DA7-ADD9-C5D08B16DEF0}" dt="2026-09-30T04:23:57.694" v="223" actId="20577"/>
+          <ac:chgData name="Zhang, Aiyin" userId="6984d0e4-55fb-4bdb-aa49-e04b2dfb6feb" providerId="ADAL" clId="{5B75A0BE-F550-4DA7-ADD9-C5D08B16DEF0}" dt="2026-09-30T22:17:16.476" v="771" actId="113"/>
           <ac:spMkLst>
             <pc:docMk/>
             <pc:sldMk cId="452660045" sldId="407"/>
@@ -170,11 +170,19 @@
         </pc:sldMkLst>
       </pc:sldChg>
       <pc:sldChg chg="addSp delSp modSp add del mod modShow">
-        <pc:chgData name="Zhang, Aiyin" userId="6984d0e4-55fb-4bdb-aa49-e04b2dfb6feb" providerId="ADAL" clId="{5B75A0BE-F550-4DA7-ADD9-C5D08B16DEF0}" dt="2026-09-30T18:00:20.070" v="678" actId="1076"/>
+        <pc:chgData name="Zhang, Aiyin" userId="6984d0e4-55fb-4bdb-aa49-e04b2dfb6feb" providerId="ADAL" clId="{5B75A0BE-F550-4DA7-ADD9-C5D08B16DEF0}" dt="2026-09-30T22:16:35.116" v="767" actId="164"/>
         <pc:sldMkLst>
           <pc:docMk/>
           <pc:sldMk cId="3455399777" sldId="412"/>
         </pc:sldMkLst>
+        <pc:spChg chg="add mod">
+          <ac:chgData name="Zhang, Aiyin" userId="6984d0e4-55fb-4bdb-aa49-e04b2dfb6feb" providerId="ADAL" clId="{5B75A0BE-F550-4DA7-ADD9-C5D08B16DEF0}" dt="2026-09-30T22:16:35.116" v="767" actId="164"/>
+          <ac:spMkLst>
+            <pc:docMk/>
+            <pc:sldMk cId="3455399777" sldId="412"/>
+            <ac:spMk id="3" creationId="{18CD91CE-7E5C-42DD-B551-BB3DDCC51D63}"/>
+          </ac:spMkLst>
+        </pc:spChg>
         <pc:spChg chg="del">
           <ac:chgData name="Zhang, Aiyin" userId="6984d0e4-55fb-4bdb-aa49-e04b2dfb6feb" providerId="ADAL" clId="{5B75A0BE-F550-4DA7-ADD9-C5D08B16DEF0}" dt="2026-09-30T17:57:05.229" v="632" actId="478"/>
           <ac:spMkLst>
@@ -232,6 +240,14 @@
           </ac:spMkLst>
         </pc:spChg>
         <pc:spChg chg="add mod">
+          <ac:chgData name="Zhang, Aiyin" userId="6984d0e4-55fb-4bdb-aa49-e04b2dfb6feb" providerId="ADAL" clId="{5B75A0BE-F550-4DA7-ADD9-C5D08B16DEF0}" dt="2026-09-30T22:14:31.707" v="751"/>
+          <ac:spMkLst>
+            <pc:docMk/>
+            <pc:sldMk cId="3455399777" sldId="412"/>
+            <ac:spMk id="18" creationId="{971E4F13-5EAB-4878-AECB-318AC97A2C3A}"/>
+          </ac:spMkLst>
+        </pc:spChg>
+        <pc:spChg chg="add mod">
           <ac:chgData name="Zhang, Aiyin" userId="6984d0e4-55fb-4bdb-aa49-e04b2dfb6feb" providerId="ADAL" clId="{5B75A0BE-F550-4DA7-ADD9-C5D08B16DEF0}" dt="2026-09-30T18:00:20.070" v="678" actId="1076"/>
           <ac:spMkLst>
             <pc:docMk/>
@@ -239,6 +255,30 @@
             <ac:spMk id="24" creationId="{9B80663F-CCB9-47DC-82EA-FDCC84FE59DB}"/>
           </ac:spMkLst>
         </pc:spChg>
+        <pc:spChg chg="add mod">
+          <ac:chgData name="Zhang, Aiyin" userId="6984d0e4-55fb-4bdb-aa49-e04b2dfb6feb" providerId="ADAL" clId="{5B75A0BE-F550-4DA7-ADD9-C5D08B16DEF0}" dt="2026-09-30T22:14:36.023" v="752"/>
+          <ac:spMkLst>
+            <pc:docMk/>
+            <pc:sldMk cId="3455399777" sldId="412"/>
+            <ac:spMk id="25" creationId="{71D6C7D3-1A60-4358-A424-13B3FACDF8F8}"/>
+          </ac:spMkLst>
+        </pc:spChg>
+        <pc:grpChg chg="add mod">
+          <ac:chgData name="Zhang, Aiyin" userId="6984d0e4-55fb-4bdb-aa49-e04b2dfb6feb" providerId="ADAL" clId="{5B75A0BE-F550-4DA7-ADD9-C5D08B16DEF0}" dt="2026-09-30T22:16:35.116" v="767" actId="164"/>
+          <ac:grpSpMkLst>
+            <pc:docMk/>
+            <pc:sldMk cId="3455399777" sldId="412"/>
+            <ac:grpSpMk id="4" creationId="{A0859249-9571-4494-AE6D-01BB0274F9C2}"/>
+          </ac:grpSpMkLst>
+        </pc:grpChg>
+        <pc:grpChg chg="del">
+          <ac:chgData name="Zhang, Aiyin" userId="6984d0e4-55fb-4bdb-aa49-e04b2dfb6feb" providerId="ADAL" clId="{5B75A0BE-F550-4DA7-ADD9-C5D08B16DEF0}" dt="2026-09-30T22:14:30.117" v="750" actId="478"/>
+          <ac:grpSpMkLst>
+            <pc:docMk/>
+            <pc:sldMk cId="3455399777" sldId="412"/>
+            <ac:grpSpMk id="16" creationId="{44524A7C-B32C-4D00-ABFD-FCDF3C579AD2}"/>
+          </ac:grpSpMkLst>
+        </pc:grpChg>
         <pc:picChg chg="add del mod modCrop">
           <ac:chgData name="Zhang, Aiyin" userId="6984d0e4-55fb-4bdb-aa49-e04b2dfb6feb" providerId="ADAL" clId="{5B75A0BE-F550-4DA7-ADD9-C5D08B16DEF0}" dt="2026-09-30T17:58:09.867" v="644" actId="1076"/>
           <ac:picMkLst>
@@ -271,8 +311,8 @@
             <ac:picMk id="12" creationId="{FC7EA79F-880E-6864-99E6-CBCF369EA527}"/>
           </ac:picMkLst>
         </pc:picChg>
-        <pc:picChg chg="add mod modCrop">
-          <ac:chgData name="Zhang, Aiyin" userId="6984d0e4-55fb-4bdb-aa49-e04b2dfb6feb" providerId="ADAL" clId="{5B75A0BE-F550-4DA7-ADD9-C5D08B16DEF0}" dt="2026-09-30T17:59:39.525" v="665" actId="1076"/>
+        <pc:picChg chg="add del mod modCrop">
+          <ac:chgData name="Zhang, Aiyin" userId="6984d0e4-55fb-4bdb-aa49-e04b2dfb6feb" providerId="ADAL" clId="{5B75A0BE-F550-4DA7-ADD9-C5D08B16DEF0}" dt="2026-09-30T22:15:51.959" v="753" actId="478"/>
           <ac:picMkLst>
             <pc:docMk/>
             <pc:sldMk cId="3455399777" sldId="412"/>
@@ -280,11 +320,19 @@
           </ac:picMkLst>
         </pc:picChg>
         <pc:picChg chg="add del mod">
-          <ac:chgData name="Zhang, Aiyin" userId="6984d0e4-55fb-4bdb-aa49-e04b2dfb6feb" providerId="ADAL" clId="{5B75A0BE-F550-4DA7-ADD9-C5D08B16DEF0}" dt="2026-09-30T17:59:55.833" v="675" actId="1038"/>
+          <ac:chgData name="Zhang, Aiyin" userId="6984d0e4-55fb-4bdb-aa49-e04b2dfb6feb" providerId="ADAL" clId="{5B75A0BE-F550-4DA7-ADD9-C5D08B16DEF0}" dt="2026-09-30T22:15:52.366" v="754" actId="478"/>
           <ac:picMkLst>
             <pc:docMk/>
             <pc:sldMk cId="3455399777" sldId="412"/>
             <ac:picMk id="23" creationId="{BA642333-A56B-4D0B-A874-BD303FA33CF4}"/>
+          </ac:picMkLst>
+        </pc:picChg>
+        <pc:picChg chg="add mod modCrop">
+          <ac:chgData name="Zhang, Aiyin" userId="6984d0e4-55fb-4bdb-aa49-e04b2dfb6feb" providerId="ADAL" clId="{5B75A0BE-F550-4DA7-ADD9-C5D08B16DEF0}" dt="2026-09-30T22:16:35.116" v="767" actId="164"/>
+          <ac:picMkLst>
+            <pc:docMk/>
+            <pc:sldMk cId="3455399777" sldId="412"/>
+            <ac:picMk id="26" creationId="{F13981A9-9560-4B0A-B5B2-438D5CEC0869}"/>
           </ac:picMkLst>
         </pc:picChg>
       </pc:sldChg>
@@ -318,14 +366,14 @@
           </ac:picMkLst>
         </pc:picChg>
       </pc:sldChg>
-      <pc:sldChg chg="modSp mod">
-        <pc:chgData name="Zhang, Aiyin" userId="6984d0e4-55fb-4bdb-aa49-e04b2dfb6feb" providerId="ADAL" clId="{5B75A0BE-F550-4DA7-ADD9-C5D08B16DEF0}" dt="2026-09-30T17:09:16.871" v="428" actId="20577"/>
+      <pc:sldChg chg="modSp del mod">
+        <pc:chgData name="Zhang, Aiyin" userId="6984d0e4-55fb-4bdb-aa49-e04b2dfb6feb" providerId="ADAL" clId="{5B75A0BE-F550-4DA7-ADD9-C5D08B16DEF0}" dt="2026-09-30T22:10:52.285" v="735" actId="47"/>
         <pc:sldMkLst>
           <pc:docMk/>
           <pc:sldMk cId="1048601941" sldId="424"/>
         </pc:sldMkLst>
         <pc:spChg chg="mod">
-          <ac:chgData name="Zhang, Aiyin" userId="6984d0e4-55fb-4bdb-aa49-e04b2dfb6feb" providerId="ADAL" clId="{5B75A0BE-F550-4DA7-ADD9-C5D08B16DEF0}" dt="2026-09-30T04:28:28.194" v="226" actId="2711"/>
+          <ac:chgData name="Zhang, Aiyin" userId="6984d0e4-55fb-4bdb-aa49-e04b2dfb6feb" providerId="ADAL" clId="{5B75A0BE-F550-4DA7-ADD9-C5D08B16DEF0}" dt="2026-09-30T20:45:05.287" v="729" actId="20577"/>
           <ac:spMkLst>
             <pc:docMk/>
             <pc:sldMk cId="1048601941" sldId="424"/>
@@ -364,8 +412,8 @@
           </ac:spMkLst>
         </pc:spChg>
       </pc:sldChg>
-      <pc:sldChg chg="modSp mod">
-        <pc:chgData name="Zhang, Aiyin" userId="6984d0e4-55fb-4bdb-aa49-e04b2dfb6feb" providerId="ADAL" clId="{5B75A0BE-F550-4DA7-ADD9-C5D08B16DEF0}" dt="2026-09-30T17:09:43.622" v="445" actId="1076"/>
+      <pc:sldChg chg="modSp del mod">
+        <pc:chgData name="Zhang, Aiyin" userId="6984d0e4-55fb-4bdb-aa49-e04b2dfb6feb" providerId="ADAL" clId="{5B75A0BE-F550-4DA7-ADD9-C5D08B16DEF0}" dt="2026-09-30T22:13:25.522" v="746" actId="47"/>
         <pc:sldMkLst>
           <pc:docMk/>
           <pc:sldMk cId="375661301" sldId="715"/>
@@ -448,13 +496,13 @@
         </pc:sldMkLst>
       </pc:sldChg>
       <pc:sldChg chg="modSp mod">
-        <pc:chgData name="Zhang, Aiyin" userId="6984d0e4-55fb-4bdb-aa49-e04b2dfb6feb" providerId="ADAL" clId="{5B75A0BE-F550-4DA7-ADD9-C5D08B16DEF0}" dt="2026-09-30T17:11:19.760" v="463" actId="2711"/>
+        <pc:chgData name="Zhang, Aiyin" userId="6984d0e4-55fb-4bdb-aa49-e04b2dfb6feb" providerId="ADAL" clId="{5B75A0BE-F550-4DA7-ADD9-C5D08B16DEF0}" dt="2026-09-30T22:13:34.006" v="747" actId="20577"/>
         <pc:sldMkLst>
           <pc:docMk/>
           <pc:sldMk cId="845924925" sldId="739"/>
         </pc:sldMkLst>
         <pc:spChg chg="mod">
-          <ac:chgData name="Zhang, Aiyin" userId="6984d0e4-55fb-4bdb-aa49-e04b2dfb6feb" providerId="ADAL" clId="{5B75A0BE-F550-4DA7-ADD9-C5D08B16DEF0}" dt="2026-09-30T04:28:44.885" v="228" actId="2711"/>
+          <ac:chgData name="Zhang, Aiyin" userId="6984d0e4-55fb-4bdb-aa49-e04b2dfb6feb" providerId="ADAL" clId="{5B75A0BE-F550-4DA7-ADD9-C5D08B16DEF0}" dt="2026-09-30T22:13:34.006" v="747" actId="20577"/>
           <ac:spMkLst>
             <pc:docMk/>
             <pc:sldMk cId="845924925" sldId="739"/>
@@ -1962,7 +2010,7 @@
         </pc:grpChg>
       </pc:sldChg>
       <pc:sldChg chg="addSp delSp modSp add mod">
-        <pc:chgData name="Zhang, Aiyin" userId="6984d0e4-55fb-4bdb-aa49-e04b2dfb6feb" providerId="ADAL" clId="{5B75A0BE-F550-4DA7-ADD9-C5D08B16DEF0}" dt="2026-09-30T18:01:35.973" v="728" actId="20577"/>
+        <pc:chgData name="Zhang, Aiyin" userId="6984d0e4-55fb-4bdb-aa49-e04b2dfb6feb" providerId="ADAL" clId="{5B75A0BE-F550-4DA7-ADD9-C5D08B16DEF0}" dt="2026-09-30T22:14:14.404" v="749" actId="1076"/>
         <pc:sldMkLst>
           <pc:docMk/>
           <pc:sldMk cId="2701496163" sldId="758"/>
@@ -1992,7 +2040,7 @@
           </ac:spMkLst>
         </pc:spChg>
         <pc:spChg chg="mod">
-          <ac:chgData name="Zhang, Aiyin" userId="6984d0e4-55fb-4bdb-aa49-e04b2dfb6feb" providerId="ADAL" clId="{5B75A0BE-F550-4DA7-ADD9-C5D08B16DEF0}" dt="2026-09-30T18:01:35.973" v="728" actId="20577"/>
+          <ac:chgData name="Zhang, Aiyin" userId="6984d0e4-55fb-4bdb-aa49-e04b2dfb6feb" providerId="ADAL" clId="{5B75A0BE-F550-4DA7-ADD9-C5D08B16DEF0}" dt="2026-09-30T22:14:14.404" v="749" actId="1076"/>
           <ac:spMkLst>
             <pc:docMk/>
             <pc:sldMk cId="2701496163" sldId="758"/>
@@ -2062,6 +2110,84 @@
             <ac:spMk id="20" creationId="{0F0545BC-8BB4-4587-A8E3-DEC22EB45D4B}"/>
           </ac:spMkLst>
         </pc:spChg>
+      </pc:sldChg>
+      <pc:sldChg chg="modSp add mod">
+        <pc:chgData name="Zhang, Aiyin" userId="6984d0e4-55fb-4bdb-aa49-e04b2dfb6feb" providerId="ADAL" clId="{5B75A0BE-F550-4DA7-ADD9-C5D08B16DEF0}" dt="2026-09-30T22:10:48.659" v="734"/>
+        <pc:sldMkLst>
+          <pc:docMk/>
+          <pc:sldMk cId="850377887" sldId="760"/>
+        </pc:sldMkLst>
+        <pc:spChg chg="mod">
+          <ac:chgData name="Zhang, Aiyin" userId="6984d0e4-55fb-4bdb-aa49-e04b2dfb6feb" providerId="ADAL" clId="{5B75A0BE-F550-4DA7-ADD9-C5D08B16DEF0}" dt="2026-09-30T22:10:28.632" v="732"/>
+          <ac:spMkLst>
+            <pc:docMk/>
+            <pc:sldMk cId="850377887" sldId="760"/>
+            <ac:spMk id="14" creationId="{BD900350-09BD-4196-8E2D-751D5040B7CF}"/>
+          </ac:spMkLst>
+        </pc:spChg>
+        <pc:spChg chg="mod">
+          <ac:chgData name="Zhang, Aiyin" userId="6984d0e4-55fb-4bdb-aa49-e04b2dfb6feb" providerId="ADAL" clId="{5B75A0BE-F550-4DA7-ADD9-C5D08B16DEF0}" dt="2026-09-30T22:10:42.784" v="733"/>
+          <ac:spMkLst>
+            <pc:docMk/>
+            <pc:sldMk cId="850377887" sldId="760"/>
+            <ac:spMk id="16" creationId="{C028B60D-9522-42C1-9446-AD9C1A6F17A5}"/>
+          </ac:spMkLst>
+        </pc:spChg>
+        <pc:spChg chg="mod">
+          <ac:chgData name="Zhang, Aiyin" userId="6984d0e4-55fb-4bdb-aa49-e04b2dfb6feb" providerId="ADAL" clId="{5B75A0BE-F550-4DA7-ADD9-C5D08B16DEF0}" dt="2026-09-30T22:10:48.659" v="734"/>
+          <ac:spMkLst>
+            <pc:docMk/>
+            <pc:sldMk cId="850377887" sldId="760"/>
+            <ac:spMk id="17" creationId="{DC08A7A1-91F9-44BD-BB29-BBAFCB6EE250}"/>
+          </ac:spMkLst>
+        </pc:spChg>
+      </pc:sldChg>
+      <pc:sldChg chg="addSp delSp modSp add mod delAnim modAnim">
+        <pc:chgData name="Zhang, Aiyin" userId="6984d0e4-55fb-4bdb-aa49-e04b2dfb6feb" providerId="ADAL" clId="{5B75A0BE-F550-4DA7-ADD9-C5D08B16DEF0}" dt="2026-09-30T22:13:24.272" v="745" actId="1076"/>
+        <pc:sldMkLst>
+          <pc:docMk/>
+          <pc:sldMk cId="4051164810" sldId="761"/>
+        </pc:sldMkLst>
+        <pc:spChg chg="add mod">
+          <ac:chgData name="Zhang, Aiyin" userId="6984d0e4-55fb-4bdb-aa49-e04b2dfb6feb" providerId="ADAL" clId="{5B75A0BE-F550-4DA7-ADD9-C5D08B16DEF0}" dt="2026-09-30T22:13:06.522" v="741" actId="1076"/>
+          <ac:spMkLst>
+            <pc:docMk/>
+            <pc:sldMk cId="4051164810" sldId="761"/>
+            <ac:spMk id="13" creationId="{EDEF73BA-EE71-46EB-8073-CDCA3A5C1612}"/>
+          </ac:spMkLst>
+        </pc:spChg>
+        <pc:spChg chg="mod">
+          <ac:chgData name="Zhang, Aiyin" userId="6984d0e4-55fb-4bdb-aa49-e04b2dfb6feb" providerId="ADAL" clId="{5B75A0BE-F550-4DA7-ADD9-C5D08B16DEF0}" dt="2026-09-30T22:11:08.225" v="738" actId="1076"/>
+          <ac:spMkLst>
+            <pc:docMk/>
+            <pc:sldMk cId="4051164810" sldId="761"/>
+            <ac:spMk id="14" creationId="{BD900350-09BD-4196-8E2D-751D5040B7CF}"/>
+          </ac:spMkLst>
+        </pc:spChg>
+        <pc:spChg chg="add mod">
+          <ac:chgData name="Zhang, Aiyin" userId="6984d0e4-55fb-4bdb-aa49-e04b2dfb6feb" providerId="ADAL" clId="{5B75A0BE-F550-4DA7-ADD9-C5D08B16DEF0}" dt="2026-09-30T22:13:13.318" v="743" actId="1076"/>
+          <ac:spMkLst>
+            <pc:docMk/>
+            <pc:sldMk cId="4051164810" sldId="761"/>
+            <ac:spMk id="18" creationId="{CBD6052A-8D20-4E39-B2FA-11154C0E63CC}"/>
+          </ac:spMkLst>
+        </pc:spChg>
+        <pc:spChg chg="add mod">
+          <ac:chgData name="Zhang, Aiyin" userId="6984d0e4-55fb-4bdb-aa49-e04b2dfb6feb" providerId="ADAL" clId="{5B75A0BE-F550-4DA7-ADD9-C5D08B16DEF0}" dt="2026-09-30T22:13:24.272" v="745" actId="1076"/>
+          <ac:spMkLst>
+            <pc:docMk/>
+            <pc:sldMk cId="4051164810" sldId="761"/>
+            <ac:spMk id="19" creationId="{A6554D2F-313E-4A59-BBE5-18F595853056}"/>
+          </ac:spMkLst>
+        </pc:spChg>
+        <pc:grpChg chg="del">
+          <ac:chgData name="Zhang, Aiyin" userId="6984d0e4-55fb-4bdb-aa49-e04b2dfb6feb" providerId="ADAL" clId="{5B75A0BE-F550-4DA7-ADD9-C5D08B16DEF0}" dt="2026-09-30T22:13:02.599" v="739" actId="478"/>
+          <ac:grpSpMkLst>
+            <pc:docMk/>
+            <pc:sldMk cId="4051164810" sldId="761"/>
+            <ac:grpSpMk id="15" creationId="{06ECA498-A083-4F52-BA75-0D6D52A44491}"/>
+          </ac:grpSpMkLst>
+        </pc:grpChg>
       </pc:sldChg>
     </pc:docChg>
   </pc:docChgLst>
@@ -3600,7 +3726,7 @@
     </p:spTree>
     <p:extLst>
       <p:ext uri="{BB962C8B-B14F-4D97-AF65-F5344CB8AC3E}">
-        <p14:creationId xmlns:p14="http://schemas.microsoft.com/office/powerpoint/2010/main" val="792334796"/>
+        <p14:creationId xmlns:p14="http://schemas.microsoft.com/office/powerpoint/2010/main" val="4183906719"/>
       </p:ext>
     </p:extLst>
   </p:cSld>
@@ -3684,7 +3810,7 @@
     </p:spTree>
     <p:extLst>
       <p:ext uri="{BB962C8B-B14F-4D97-AF65-F5344CB8AC3E}">
-        <p14:creationId xmlns:p14="http://schemas.microsoft.com/office/powerpoint/2010/main" val="178433171"/>
+        <p14:creationId xmlns:p14="http://schemas.microsoft.com/office/powerpoint/2010/main" val="2466794021"/>
       </p:ext>
     </p:extLst>
   </p:cSld>
@@ -11811,8 +11937,8 @@
         </p:nvSpPr>
         <p:spPr>
           <a:xfrm>
-            <a:off x="6137656" y="1510825"/>
-            <a:ext cx="6039432" cy="400110"/>
+            <a:off x="6049835" y="1531214"/>
+            <a:ext cx="6039432" cy="707886"/>
           </a:xfrm>
           <a:prstGeom prst="rect">
             <a:avLst/>
@@ -11833,7 +11959,7 @@
                 <a:latin typeface="Arial" panose="020B0604020202020204" pitchFamily="34" charset="0"/>
                 <a:cs typeface="Arial" panose="020B0604020202020204" pitchFamily="34" charset="0"/>
               </a:rPr>
-              <a:t>DynamicPATCH creates </a:t>
+              <a:t>DynamicPATCH creates maps of patch transition types</a:t>
             </a:r>
             <a:endParaRPr lang="en-US" sz="2000" dirty="0">
               <a:latin typeface="Arial" panose="020B0604020202020204" pitchFamily="34" charset="0"/>
@@ -12245,7 +12371,7 @@
 </file>
 
 <file path=ppt/slides/slide14.xml><?xml version="1.0" encoding="utf-8"?>
-<p:sld xmlns:a="http://schemas.openxmlformats.org/drawingml/2006/main" xmlns:r="http://schemas.openxmlformats.org/officeDocument/2006/relationships" xmlns:p="http://schemas.openxmlformats.org/presentationml/2006/main" show="0">
+<p:sld xmlns:a="http://schemas.openxmlformats.org/drawingml/2006/main" xmlns:r="http://schemas.openxmlformats.org/officeDocument/2006/relationships" xmlns:p="http://schemas.openxmlformats.org/presentationml/2006/main">
   <p:cSld>
     <p:spTree>
       <p:nvGrpSpPr>
@@ -12510,262 +12636,6 @@
           </a:p>
         </p:txBody>
       </p:sp>
-      <p:grpSp>
-        <p:nvGrpSpPr>
-          <p:cNvPr id="16" name="Group 15">
-            <a:extLst>
-              <a:ext uri="{FF2B5EF4-FFF2-40B4-BE49-F238E27FC236}">
-                <a16:creationId xmlns:a16="http://schemas.microsoft.com/office/drawing/2014/main" id="{44524A7C-B32C-4D00-ABFD-FCDF3C579AD2}"/>
-              </a:ext>
-            </a:extLst>
-          </p:cNvPr>
-          <p:cNvGrpSpPr/>
-          <p:nvPr/>
-        </p:nvGrpSpPr>
-        <p:grpSpPr>
-          <a:xfrm>
-            <a:off x="55690" y="-27034"/>
-            <a:ext cx="12355385" cy="954107"/>
-            <a:chOff x="55690" y="-27034"/>
-            <a:chExt cx="12355385" cy="954107"/>
-          </a:xfrm>
-        </p:grpSpPr>
-        <p:sp>
-          <p:nvSpPr>
-            <p:cNvPr id="17" name="Title 1">
-              <a:extLst>
-                <a:ext uri="{FF2B5EF4-FFF2-40B4-BE49-F238E27FC236}">
-                  <a16:creationId xmlns:a16="http://schemas.microsoft.com/office/drawing/2014/main" id="{51D7CD82-044F-45FC-9B34-9AFA02170126}"/>
-                </a:ext>
-              </a:extLst>
-            </p:cNvPr>
-            <p:cNvSpPr txBox="1">
-              <a:spLocks/>
-            </p:cNvSpPr>
-            <p:nvPr/>
-          </p:nvSpPr>
-          <p:spPr>
-            <a:xfrm>
-              <a:off x="55690" y="73873"/>
-              <a:ext cx="12355385" cy="835356"/>
-            </a:xfrm>
-            <a:prstGeom prst="rect">
-              <a:avLst/>
-            </a:prstGeom>
-          </p:spPr>
-          <p:txBody>
-            <a:bodyPr vert="horz" lIns="91440" tIns="45720" rIns="91440" bIns="45720" rtlCol="0" anchor="ctr">
-              <a:noAutofit/>
-            </a:bodyPr>
-            <a:lstStyle>
-              <a:lvl1pPr algn="l" defTabSz="914400" rtl="0" eaLnBrk="1" latinLnBrk="0" hangingPunct="1">
-                <a:lnSpc>
-                  <a:spcPct val="90000"/>
-                </a:lnSpc>
-                <a:spcBef>
-                  <a:spcPct val="0"/>
-                </a:spcBef>
-                <a:buNone/>
-                <a:defRPr sz="4400" kern="1200">
-                  <a:solidFill>
-                    <a:schemeClr val="tx1"/>
-                  </a:solidFill>
-                  <a:latin typeface="+mj-lt"/>
-                  <a:ea typeface="+mj-ea"/>
-                  <a:cs typeface="+mj-cs"/>
-                </a:defRPr>
-              </a:lvl1pPr>
-            </a:lstStyle>
-            <a:p>
-              <a:br>
-                <a:rPr lang="en-US" sz="3200" b="1" dirty="0">
-                  <a:latin typeface="Arial" panose="020B0604020202020204" pitchFamily="34" charset="0"/>
-                  <a:cs typeface="Arial" panose="020B0604020202020204" pitchFamily="34" charset="0"/>
-                </a:rPr>
-              </a:br>
-              <a:endParaRPr lang="en-US" sz="3200" b="1" dirty="0">
-                <a:latin typeface="Arial" panose="020B0604020202020204" pitchFamily="34" charset="0"/>
-                <a:cs typeface="Arial" panose="020B0604020202020204" pitchFamily="34" charset="0"/>
-              </a:endParaRPr>
-            </a:p>
-          </p:txBody>
-        </p:sp>
-        <p:sp>
-          <p:nvSpPr>
-            <p:cNvPr id="20" name="Rectangle 19">
-              <a:extLst>
-                <a:ext uri="{FF2B5EF4-FFF2-40B4-BE49-F238E27FC236}">
-                  <a16:creationId xmlns:a16="http://schemas.microsoft.com/office/drawing/2014/main" id="{6C5C4F5C-EE8C-4D2A-9AAC-FC1FD5715F15}"/>
-                </a:ext>
-              </a:extLst>
-            </p:cNvPr>
-            <p:cNvSpPr/>
-            <p:nvPr/>
-          </p:nvSpPr>
-          <p:spPr>
-            <a:xfrm>
-              <a:off x="83312" y="-27034"/>
-              <a:ext cx="12108688" cy="954107"/>
-            </a:xfrm>
-            <a:prstGeom prst="rect">
-              <a:avLst/>
-            </a:prstGeom>
-          </p:spPr>
-          <p:txBody>
-            <a:bodyPr wrap="square">
-              <a:spAutoFit/>
-            </a:bodyPr>
-            <a:lstStyle/>
-            <a:p>
-              <a:r>
-                <a:rPr lang="en-US" sz="3200" b="1" dirty="0">
-                  <a:solidFill>
-                    <a:srgbClr val="C00000"/>
-                  </a:solidFill>
-                  <a:latin typeface="Century Gothic" panose="020B0502020202020204" pitchFamily="34" charset="0"/>
-                  <a:ea typeface="Calibri" panose="020F0502020204030204" pitchFamily="34" charset="0"/>
-                  <a:cs typeface="Calibri" panose="020F0502020204030204" pitchFamily="34" charset="0"/>
-                </a:rPr>
-                <a:t>Case study at PIE-LTER</a:t>
-              </a:r>
-            </a:p>
-            <a:p>
-              <a:r>
-                <a:rPr lang="en-US" sz="2400" dirty="0">
-                  <a:latin typeface="Century Gothic" panose="020B0502020202020204" pitchFamily="34" charset="0"/>
-                  <a:cs typeface="Arial" panose="020B0604020202020204" pitchFamily="34" charset="0"/>
-                </a:rPr>
-                <a:t>Results</a:t>
-              </a:r>
-              <a:endParaRPr lang="en-US" sz="2400" dirty="0">
-                <a:latin typeface="Century Gothic" panose="020B0502020202020204" pitchFamily="34" charset="0"/>
-              </a:endParaRPr>
-            </a:p>
-          </p:txBody>
-        </p:sp>
-        <p:sp>
-          <p:nvSpPr>
-            <p:cNvPr id="21" name="Rectangle 20">
-              <a:extLst>
-                <a:ext uri="{FF2B5EF4-FFF2-40B4-BE49-F238E27FC236}">
-                  <a16:creationId xmlns:a16="http://schemas.microsoft.com/office/drawing/2014/main" id="{77D5E0E8-EABF-4E18-B3C6-D3D9BC1504A8}"/>
-                </a:ext>
-              </a:extLst>
-            </p:cNvPr>
-            <p:cNvSpPr/>
-            <p:nvPr/>
-          </p:nvSpPr>
-          <p:spPr>
-            <a:xfrm>
-              <a:off x="55690" y="73024"/>
-              <a:ext cx="45719" cy="788580"/>
-            </a:xfrm>
-            <a:prstGeom prst="rect">
-              <a:avLst/>
-            </a:prstGeom>
-            <a:solidFill>
-              <a:srgbClr val="C00000"/>
-            </a:solidFill>
-            <a:ln>
-              <a:noFill/>
-            </a:ln>
-          </p:spPr>
-          <p:style>
-            <a:lnRef idx="2">
-              <a:schemeClr val="accent1">
-                <a:shade val="15000"/>
-              </a:schemeClr>
-            </a:lnRef>
-            <a:fillRef idx="1">
-              <a:schemeClr val="accent1"/>
-            </a:fillRef>
-            <a:effectRef idx="0">
-              <a:schemeClr val="accent1"/>
-            </a:effectRef>
-            <a:fontRef idx="minor">
-              <a:schemeClr val="lt1"/>
-            </a:fontRef>
-          </p:style>
-          <p:txBody>
-            <a:bodyPr rtlCol="0" anchor="ctr"/>
-            <a:lstStyle/>
-            <a:p>
-              <a:pPr algn="ctr"/>
-              <a:endParaRPr lang="en-US">
-                <a:solidFill>
-                  <a:srgbClr val="C81F1F"/>
-                </a:solidFill>
-              </a:endParaRPr>
-            </a:p>
-          </p:txBody>
-        </p:sp>
-      </p:grpSp>
-      <p:pic>
-        <p:nvPicPr>
-          <p:cNvPr id="22" name="Picture 21">
-            <a:extLst>
-              <a:ext uri="{FF2B5EF4-FFF2-40B4-BE49-F238E27FC236}">
-                <a16:creationId xmlns:a16="http://schemas.microsoft.com/office/drawing/2014/main" id="{78CF2203-638D-4BFF-A195-1CFAD59820E8}"/>
-              </a:ext>
-            </a:extLst>
-          </p:cNvPr>
-          <p:cNvPicPr/>
-          <p:nvPr/>
-        </p:nvPicPr>
-        <p:blipFill rotWithShape="1">
-          <a:blip r:embed="rId7">
-            <a:extLst>
-              <a:ext uri="{28A0092B-C50C-407E-A947-70E740481C1C}">
-                <a14:useLocalDpi xmlns:a14="http://schemas.microsoft.com/office/drawing/2010/main" val="0"/>
-              </a:ext>
-            </a:extLst>
-          </a:blip>
-          <a:srcRect l="46505"/>
-          <a:stretch/>
-        </p:blipFill>
-        <p:spPr>
-          <a:xfrm>
-            <a:off x="6263395" y="850934"/>
-            <a:ext cx="5498969" cy="2520461"/>
-          </a:xfrm>
-          <a:prstGeom prst="rect">
-            <a:avLst/>
-          </a:prstGeom>
-        </p:spPr>
-      </p:pic>
-      <p:pic>
-        <p:nvPicPr>
-          <p:cNvPr id="23" name="Picture 22">
-            <a:extLst>
-              <a:ext uri="{FF2B5EF4-FFF2-40B4-BE49-F238E27FC236}">
-                <a16:creationId xmlns:a16="http://schemas.microsoft.com/office/drawing/2014/main" id="{BA642333-A56B-4D0B-A874-BD303FA33CF4}"/>
-              </a:ext>
-            </a:extLst>
-          </p:cNvPr>
-          <p:cNvPicPr/>
-          <p:nvPr/>
-        </p:nvPicPr>
-        <p:blipFill rotWithShape="1">
-          <a:blip r:embed="rId8">
-            <a:extLst>
-              <a:ext uri="{28A0092B-C50C-407E-A947-70E740481C1C}">
-                <a14:useLocalDpi xmlns:a14="http://schemas.microsoft.com/office/drawing/2010/main" val="0"/>
-              </a:ext>
-            </a:extLst>
-          </a:blip>
-          <a:srcRect l="47299" b="-1106"/>
-          <a:stretch/>
-        </p:blipFill>
-        <p:spPr>
-          <a:xfrm>
-            <a:off x="6311020" y="3336693"/>
-            <a:ext cx="5498968" cy="2621988"/>
-          </a:xfrm>
-          <a:prstGeom prst="rect">
-            <a:avLst/>
-          </a:prstGeom>
-        </p:spPr>
-      </p:pic>
       <p:sp>
         <p:nvSpPr>
           <p:cNvPr id="24" name="TextBox 23">
@@ -12841,6 +12711,203 @@
           </a:p>
         </p:txBody>
       </p:sp>
+      <p:sp>
+        <p:nvSpPr>
+          <p:cNvPr id="18" name="Rectangle 17">
+            <a:extLst>
+              <a:ext uri="{FF2B5EF4-FFF2-40B4-BE49-F238E27FC236}">
+                <a16:creationId xmlns:a16="http://schemas.microsoft.com/office/drawing/2014/main" id="{971E4F13-5EAB-4878-AECB-318AC97A2C3A}"/>
+              </a:ext>
+            </a:extLst>
+          </p:cNvPr>
+          <p:cNvSpPr/>
+          <p:nvPr/>
+        </p:nvSpPr>
+        <p:spPr>
+          <a:xfrm>
+            <a:off x="55690" y="73024"/>
+            <a:ext cx="45719" cy="384176"/>
+          </a:xfrm>
+          <a:prstGeom prst="rect">
+            <a:avLst/>
+          </a:prstGeom>
+          <a:solidFill>
+            <a:srgbClr val="C00000"/>
+          </a:solidFill>
+          <a:ln>
+            <a:noFill/>
+          </a:ln>
+        </p:spPr>
+        <p:style>
+          <a:lnRef idx="2">
+            <a:schemeClr val="accent1">
+              <a:shade val="15000"/>
+            </a:schemeClr>
+          </a:lnRef>
+          <a:fillRef idx="1">
+            <a:schemeClr val="accent1"/>
+          </a:fillRef>
+          <a:effectRef idx="0">
+            <a:schemeClr val="accent1"/>
+          </a:effectRef>
+          <a:fontRef idx="minor">
+            <a:schemeClr val="lt1"/>
+          </a:fontRef>
+        </p:style>
+        <p:txBody>
+          <a:bodyPr rtlCol="0" anchor="ctr"/>
+          <a:lstStyle/>
+          <a:p>
+            <a:pPr algn="ctr"/>
+            <a:endParaRPr lang="en-US">
+              <a:solidFill>
+                <a:srgbClr val="C81F1F"/>
+              </a:solidFill>
+            </a:endParaRPr>
+          </a:p>
+        </p:txBody>
+      </p:sp>
+      <p:sp>
+        <p:nvSpPr>
+          <p:cNvPr id="25" name="Rectangle 24">
+            <a:extLst>
+              <a:ext uri="{FF2B5EF4-FFF2-40B4-BE49-F238E27FC236}">
+                <a16:creationId xmlns:a16="http://schemas.microsoft.com/office/drawing/2014/main" id="{71D6C7D3-1A60-4358-A424-13B3FACDF8F8}"/>
+              </a:ext>
+            </a:extLst>
+          </p:cNvPr>
+          <p:cNvSpPr/>
+          <p:nvPr/>
+        </p:nvSpPr>
+        <p:spPr>
+          <a:xfrm>
+            <a:off x="83312" y="-27034"/>
+            <a:ext cx="12108688" cy="584775"/>
+          </a:xfrm>
+          <a:prstGeom prst="rect">
+            <a:avLst/>
+          </a:prstGeom>
+        </p:spPr>
+        <p:txBody>
+          <a:bodyPr wrap="square">
+            <a:spAutoFit/>
+          </a:bodyPr>
+          <a:lstStyle/>
+          <a:p>
+            <a:r>
+              <a:rPr lang="en-US" sz="3200" b="1" dirty="0">
+                <a:solidFill>
+                  <a:srgbClr val="C00000"/>
+                </a:solidFill>
+                <a:latin typeface="Century Gothic" panose="020B0502020202020204" pitchFamily="34" charset="0"/>
+                <a:ea typeface="Calibri" panose="020F0502020204030204" pitchFamily="34" charset="0"/>
+                <a:cs typeface="Calibri" panose="020F0502020204030204" pitchFamily="34" charset="0"/>
+              </a:rPr>
+              <a:t>Case study at PIE-LTER</a:t>
+            </a:r>
+          </a:p>
+        </p:txBody>
+      </p:sp>
+      <p:grpSp>
+        <p:nvGrpSpPr>
+          <p:cNvPr id="4" name="Group 3">
+            <a:extLst>
+              <a:ext uri="{FF2B5EF4-FFF2-40B4-BE49-F238E27FC236}">
+                <a16:creationId xmlns:a16="http://schemas.microsoft.com/office/drawing/2014/main" id="{A0859249-9571-4494-AE6D-01BB0274F9C2}"/>
+              </a:ext>
+            </a:extLst>
+          </p:cNvPr>
+          <p:cNvGrpSpPr/>
+          <p:nvPr/>
+        </p:nvGrpSpPr>
+        <p:grpSpPr>
+          <a:xfrm>
+            <a:off x="6574194" y="944880"/>
+            <a:ext cx="5465877" cy="4747183"/>
+            <a:chOff x="6574194" y="944880"/>
+            <a:chExt cx="5465877" cy="4747183"/>
+          </a:xfrm>
+        </p:grpSpPr>
+        <p:pic>
+          <p:nvPicPr>
+            <p:cNvPr id="26" name="Picture 25">
+              <a:extLst>
+                <a:ext uri="{FF2B5EF4-FFF2-40B4-BE49-F238E27FC236}">
+                  <a16:creationId xmlns:a16="http://schemas.microsoft.com/office/drawing/2014/main" id="{F13981A9-9560-4B0A-B5B2-438D5CEC0869}"/>
+                </a:ext>
+              </a:extLst>
+            </p:cNvPr>
+            <p:cNvPicPr/>
+            <p:nvPr/>
+          </p:nvPicPr>
+          <p:blipFill rotWithShape="1">
+            <a:blip r:embed="rId7"/>
+            <a:srcRect l="45233" t="4410"/>
+            <a:stretch/>
+          </p:blipFill>
+          <p:spPr>
+            <a:xfrm>
+              <a:off x="6574194" y="944880"/>
+              <a:ext cx="5465877" cy="4747183"/>
+            </a:xfrm>
+            <a:prstGeom prst="rect">
+              <a:avLst/>
+            </a:prstGeom>
+          </p:spPr>
+        </p:pic>
+        <p:sp>
+          <p:nvSpPr>
+            <p:cNvPr id="3" name="Rectangle 2">
+              <a:extLst>
+                <a:ext uri="{FF2B5EF4-FFF2-40B4-BE49-F238E27FC236}">
+                  <a16:creationId xmlns:a16="http://schemas.microsoft.com/office/drawing/2014/main" id="{18CD91CE-7E5C-42DD-B551-BB3DDCC51D63}"/>
+                </a:ext>
+              </a:extLst>
+            </p:cNvPr>
+            <p:cNvSpPr/>
+            <p:nvPr/>
+          </p:nvSpPr>
+          <p:spPr>
+            <a:xfrm>
+              <a:off x="7071360" y="3192780"/>
+              <a:ext cx="289560" cy="182880"/>
+            </a:xfrm>
+            <a:prstGeom prst="rect">
+              <a:avLst/>
+            </a:prstGeom>
+            <a:solidFill>
+              <a:schemeClr val="bg1"/>
+            </a:solidFill>
+            <a:ln>
+              <a:noFill/>
+            </a:ln>
+          </p:spPr>
+          <p:style>
+            <a:lnRef idx="2">
+              <a:schemeClr val="accent1">
+                <a:shade val="50000"/>
+              </a:schemeClr>
+            </a:lnRef>
+            <a:fillRef idx="1">
+              <a:schemeClr val="accent1"/>
+            </a:fillRef>
+            <a:effectRef idx="0">
+              <a:schemeClr val="accent1"/>
+            </a:effectRef>
+            <a:fontRef idx="minor">
+              <a:schemeClr val="lt1"/>
+            </a:fontRef>
+          </p:style>
+          <p:txBody>
+            <a:bodyPr rtlCol="0" anchor="ctr"/>
+            <a:lstStyle/>
+            <a:p>
+              <a:pPr algn="ctr"/>
+              <a:endParaRPr lang="en-US"/>
+            </a:p>
+          </p:txBody>
+        </p:sp>
+      </p:grpSp>
     </p:spTree>
     <p:extLst>
       <p:ext uri="{BB962C8B-B14F-4D97-AF65-F5344CB8AC3E}">
@@ -13803,7 +13870,7 @@
         <p:spPr>
           <a:xfrm>
             <a:off x="83312" y="-27034"/>
-            <a:ext cx="12108688" cy="861774"/>
+            <a:ext cx="12108688" cy="1077218"/>
           </a:xfrm>
           <a:prstGeom prst="rect">
             <a:avLst/>
@@ -13821,28 +13888,24 @@
                   <a:srgbClr val="C00000"/>
                 </a:solidFill>
                 <a:latin typeface="Century Gothic" panose="020B0502020202020204" pitchFamily="34" charset="0"/>
-                <a:ea typeface="Calibri" panose="020F0502020204030204" pitchFamily="34" charset="0"/>
-                <a:cs typeface="Calibri" panose="020F0502020204030204" pitchFamily="34" charset="0"/>
-              </a:rPr>
-              <a:t>Discussions</a:t>
-            </a:r>
-          </a:p>
-          <a:p>
-            <a:r>
-              <a:rPr lang="en-US" dirty="0">
-                <a:latin typeface="Century Gothic" panose="020B0502020202020204" pitchFamily="34" charset="0"/>
                 <a:cs typeface="Arial" panose="020B0604020202020204" pitchFamily="34" charset="0"/>
               </a:rPr>
               <a:t>DynamicPATCH captures gross transitions </a:t>
             </a:r>
             <a:r>
-              <a:rPr lang="en-US" altLang="zh-CN" dirty="0">
+              <a:rPr lang="en-US" altLang="zh-CN" sz="3200" b="1" dirty="0">
+                <a:solidFill>
+                  <a:srgbClr val="C00000"/>
+                </a:solidFill>
                 <a:latin typeface="Century Gothic" panose="020B0502020202020204" pitchFamily="34" charset="0"/>
                 <a:cs typeface="Arial" panose="020B0604020202020204" pitchFamily="34" charset="0"/>
               </a:rPr>
               <a:t>hidden by net change metrics</a:t>
             </a:r>
-            <a:endParaRPr lang="en-US" dirty="0">
+            <a:endParaRPr lang="en-US" sz="3200" b="1" dirty="0">
+              <a:solidFill>
+                <a:srgbClr val="C00000"/>
+              </a:solidFill>
               <a:latin typeface="Century Gothic" panose="020B0502020202020204" pitchFamily="34" charset="0"/>
             </a:endParaRPr>
           </a:p>
@@ -19528,10 +19591,10 @@
       </p:sp>
       <p:pic>
         <p:nvPicPr>
-          <p:cNvPr id="5" name="Picture 4">
+          <p:cNvPr id="11" name="Picture 10">
             <a:extLst>
               <a:ext uri="{FF2B5EF4-FFF2-40B4-BE49-F238E27FC236}">
-                <a16:creationId xmlns:a16="http://schemas.microsoft.com/office/drawing/2014/main" id="{E71E970C-2657-7B9A-4B3D-DF53F02B5131}"/>
+                <a16:creationId xmlns:a16="http://schemas.microsoft.com/office/drawing/2014/main" id="{5C100582-99ED-4E51-B6A4-6747B12E8D42}"/>
               </a:ext>
             </a:extLst>
           </p:cNvPr>
@@ -19553,7 +19616,7 @@
         </p:blipFill>
         <p:spPr>
           <a:xfrm>
-            <a:off x="1337241" y="2300895"/>
+            <a:off x="1553141" y="1709519"/>
             <a:ext cx="9351344" cy="2731268"/>
           </a:xfrm>
           <a:prstGeom prst="rect">
@@ -19563,156 +19626,10 @@
       </p:pic>
       <p:grpSp>
         <p:nvGrpSpPr>
-          <p:cNvPr id="9" name="Group 8">
+          <p:cNvPr id="7" name="Group 6">
             <a:extLst>
               <a:ext uri="{FF2B5EF4-FFF2-40B4-BE49-F238E27FC236}">
-                <a16:creationId xmlns:a16="http://schemas.microsoft.com/office/drawing/2014/main" id="{BC09F3B2-FF30-48E9-BCF5-66B9916C91CC}"/>
-              </a:ext>
-            </a:extLst>
-          </p:cNvPr>
-          <p:cNvGrpSpPr/>
-          <p:nvPr/>
-        </p:nvGrpSpPr>
-        <p:grpSpPr>
-          <a:xfrm>
-            <a:off x="1821092" y="5013662"/>
-            <a:ext cx="8549818" cy="369333"/>
-            <a:chOff x="1821092" y="5013662"/>
-            <a:chExt cx="8549818" cy="369333"/>
-          </a:xfrm>
-        </p:grpSpPr>
-        <p:sp>
-          <p:nvSpPr>
-            <p:cNvPr id="12" name="TextBox 11">
-              <a:extLst>
-                <a:ext uri="{FF2B5EF4-FFF2-40B4-BE49-F238E27FC236}">
-                  <a16:creationId xmlns:a16="http://schemas.microsoft.com/office/drawing/2014/main" id="{85E0F6C2-1DD2-C01B-E5AF-52B34359E651}"/>
-                </a:ext>
-              </a:extLst>
-            </p:cNvPr>
-            <p:cNvSpPr txBox="1"/>
-            <p:nvPr/>
-          </p:nvSpPr>
-          <p:spPr>
-            <a:xfrm>
-              <a:off x="1821092" y="5013663"/>
-              <a:ext cx="3983805" cy="369332"/>
-            </a:xfrm>
-            <a:prstGeom prst="rect">
-              <a:avLst/>
-            </a:prstGeom>
-            <a:noFill/>
-          </p:spPr>
-          <p:txBody>
-            <a:bodyPr wrap="square">
-              <a:spAutoFit/>
-            </a:bodyPr>
-            <a:lstStyle/>
-            <a:p>
-              <a:pPr lvl="1"/>
-              <a:r>
-                <a:rPr lang="en-US">
-                  <a:cs typeface="Arial" panose="020B0604020202020204" pitchFamily="34" charset="0"/>
-                </a:rPr>
-                <a:t>Number of presence patches: 8 </a:t>
-              </a:r>
-            </a:p>
-          </p:txBody>
-        </p:sp>
-        <p:sp>
-          <p:nvSpPr>
-            <p:cNvPr id="13" name="TextBox 12">
-              <a:extLst>
-                <a:ext uri="{FF2B5EF4-FFF2-40B4-BE49-F238E27FC236}">
-                  <a16:creationId xmlns:a16="http://schemas.microsoft.com/office/drawing/2014/main" id="{BF8B60E7-16F9-A06D-8FA9-2AD860177ABD}"/>
-                </a:ext>
-              </a:extLst>
-            </p:cNvPr>
-            <p:cNvSpPr txBox="1"/>
-            <p:nvPr/>
-          </p:nvSpPr>
-          <p:spPr>
-            <a:xfrm>
-              <a:off x="6387105" y="5013662"/>
-              <a:ext cx="3983805" cy="369332"/>
-            </a:xfrm>
-            <a:prstGeom prst="rect">
-              <a:avLst/>
-            </a:prstGeom>
-            <a:noFill/>
-          </p:spPr>
-          <p:txBody>
-            <a:bodyPr wrap="square">
-              <a:spAutoFit/>
-            </a:bodyPr>
-            <a:lstStyle/>
-            <a:p>
-              <a:pPr lvl="1"/>
-              <a:r>
-                <a:rPr lang="en-US">
-                  <a:cs typeface="Arial" panose="020B0604020202020204" pitchFamily="34" charset="0"/>
-                </a:rPr>
-                <a:t>Number of presence patches: 8 </a:t>
-              </a:r>
-            </a:p>
-          </p:txBody>
-        </p:sp>
-      </p:grpSp>
-      <p:sp>
-        <p:nvSpPr>
-          <p:cNvPr id="15" name="TextBox 14">
-            <a:extLst>
-              <a:ext uri="{FF2B5EF4-FFF2-40B4-BE49-F238E27FC236}">
-                <a16:creationId xmlns:a16="http://schemas.microsoft.com/office/drawing/2014/main" id="{5B82F88D-ACBE-7198-3A68-7F0D65EE3936}"/>
-              </a:ext>
-            </a:extLst>
-          </p:cNvPr>
-          <p:cNvSpPr txBox="1"/>
-          <p:nvPr/>
-        </p:nvSpPr>
-        <p:spPr>
-          <a:xfrm>
-            <a:off x="609761" y="1115598"/>
-            <a:ext cx="10972477" cy="830997"/>
-          </a:xfrm>
-          <a:prstGeom prst="rect">
-            <a:avLst/>
-          </a:prstGeom>
-          <a:noFill/>
-        </p:spPr>
-        <p:txBody>
-          <a:bodyPr wrap="square">
-            <a:spAutoFit/>
-          </a:bodyPr>
-          <a:lstStyle/>
-          <a:p>
-            <a:pPr lvl="1" algn="ctr"/>
-            <a:r>
-              <a:rPr lang="en-US" sz="2400" b="1" dirty="0">
-                <a:latin typeface="Arial" panose="020B0604020202020204" pitchFamily="34" charset="0"/>
-                <a:cs typeface="Arial" panose="020B0604020202020204" pitchFamily="34" charset="0"/>
-              </a:rPr>
-              <a:t>How many presence patches at the initial time and the final time?</a:t>
-            </a:r>
-          </a:p>
-          <a:p>
-            <a:pPr lvl="1" algn="ctr"/>
-            <a:r>
-              <a:rPr lang="en-US" sz="2400" b="1" dirty="0">
-                <a:latin typeface="Arial" panose="020B0604020202020204" pitchFamily="34" charset="0"/>
-                <a:cs typeface="Arial" panose="020B0604020202020204" pitchFamily="34" charset="0"/>
-              </a:rPr>
-              <a:t>How many absence patches at the initial time and final time? </a:t>
-            </a:r>
-          </a:p>
-        </p:txBody>
-      </p:sp>
-      <p:grpSp>
-        <p:nvGrpSpPr>
-          <p:cNvPr id="10" name="Group 9">
-            <a:extLst>
-              <a:ext uri="{FF2B5EF4-FFF2-40B4-BE49-F238E27FC236}">
-                <a16:creationId xmlns:a16="http://schemas.microsoft.com/office/drawing/2014/main" id="{74C63CA6-030D-494C-9A44-BA07D8106F89}"/>
+                <a16:creationId xmlns:a16="http://schemas.microsoft.com/office/drawing/2014/main" id="{C7F78D77-53BC-423B-9B8E-4A78CF1FFA47}"/>
               </a:ext>
             </a:extLst>
           </p:cNvPr>
@@ -19729,10 +19646,10 @@
         </p:grpSpPr>
         <p:sp>
           <p:nvSpPr>
-            <p:cNvPr id="11" name="Title 1">
+            <p:cNvPr id="8" name="Title 1">
               <a:extLst>
                 <a:ext uri="{FF2B5EF4-FFF2-40B4-BE49-F238E27FC236}">
-                  <a16:creationId xmlns:a16="http://schemas.microsoft.com/office/drawing/2014/main" id="{F9D709C6-52FB-4918-8C7B-15355B0527B2}"/>
+                  <a16:creationId xmlns:a16="http://schemas.microsoft.com/office/drawing/2014/main" id="{D842E2B4-4CD9-41B8-8A8D-95038876F444}"/>
                 </a:ext>
               </a:extLst>
             </p:cNvPr>
@@ -19789,10 +19706,10 @@
         </p:sp>
         <p:sp>
           <p:nvSpPr>
-            <p:cNvPr id="16" name="Rectangle 15">
+            <p:cNvPr id="9" name="Rectangle 8">
               <a:extLst>
                 <a:ext uri="{FF2B5EF4-FFF2-40B4-BE49-F238E27FC236}">
-                  <a16:creationId xmlns:a16="http://schemas.microsoft.com/office/drawing/2014/main" id="{DC158C50-69A6-4816-9E7C-0A80AE883AB2}"/>
+                  <a16:creationId xmlns:a16="http://schemas.microsoft.com/office/drawing/2014/main" id="{3AA204A0-6EB6-4ACE-974E-5D8C9381772C}"/>
                 </a:ext>
               </a:extLst>
             </p:cNvPr>
@@ -19830,10 +19747,10 @@
         </p:sp>
         <p:sp>
           <p:nvSpPr>
-            <p:cNvPr id="17" name="Rectangle 16">
+            <p:cNvPr id="12" name="Rectangle 11">
               <a:extLst>
                 <a:ext uri="{FF2B5EF4-FFF2-40B4-BE49-F238E27FC236}">
-                  <a16:creationId xmlns:a16="http://schemas.microsoft.com/office/drawing/2014/main" id="{E79271A7-12AC-4555-9F0C-0740ADC36E07}"/>
+                  <a16:creationId xmlns:a16="http://schemas.microsoft.com/office/drawing/2014/main" id="{3C0DA6DC-BD03-4876-BFEC-2542026A963E}"/>
                 </a:ext>
               </a:extLst>
             </p:cNvPr>
@@ -19885,10 +19802,146 @@
           </p:txBody>
         </p:sp>
       </p:grpSp>
+      <p:sp>
+        <p:nvSpPr>
+          <p:cNvPr id="14" name="TextBox 13">
+            <a:extLst>
+              <a:ext uri="{FF2B5EF4-FFF2-40B4-BE49-F238E27FC236}">
+                <a16:creationId xmlns:a16="http://schemas.microsoft.com/office/drawing/2014/main" id="{BD900350-09BD-4196-8E2D-751D5040B7CF}"/>
+              </a:ext>
+            </a:extLst>
+          </p:cNvPr>
+          <p:cNvSpPr txBox="1"/>
+          <p:nvPr/>
+        </p:nvSpPr>
+        <p:spPr>
+          <a:xfrm>
+            <a:off x="-281132" y="1153557"/>
+            <a:ext cx="12473132" cy="461665"/>
+          </a:xfrm>
+          <a:prstGeom prst="rect">
+            <a:avLst/>
+          </a:prstGeom>
+          <a:noFill/>
+        </p:spPr>
+        <p:txBody>
+          <a:bodyPr wrap="square">
+            <a:spAutoFit/>
+          </a:bodyPr>
+          <a:lstStyle/>
+          <a:p>
+            <a:pPr lvl="1" algn="ctr"/>
+            <a:r>
+              <a:rPr lang="en-US" sz="2400" b="1" dirty="0">
+                <a:latin typeface="Arial" panose="020B0604020202020204" pitchFamily="34" charset="0"/>
+                <a:cs typeface="Arial" panose="020B0604020202020204" pitchFamily="34" charset="0"/>
+              </a:rPr>
+              <a:t>How many presence patches at the initial time and the final time?</a:t>
+            </a:r>
+          </a:p>
+        </p:txBody>
+      </p:sp>
+      <p:grpSp>
+        <p:nvGrpSpPr>
+          <p:cNvPr id="15" name="Group 14">
+            <a:extLst>
+              <a:ext uri="{FF2B5EF4-FFF2-40B4-BE49-F238E27FC236}">
+                <a16:creationId xmlns:a16="http://schemas.microsoft.com/office/drawing/2014/main" id="{06ECA498-A083-4F52-BA75-0D6D52A44491}"/>
+              </a:ext>
+            </a:extLst>
+          </p:cNvPr>
+          <p:cNvGrpSpPr/>
+          <p:nvPr/>
+        </p:nvGrpSpPr>
+        <p:grpSpPr>
+          <a:xfrm>
+            <a:off x="1862747" y="4535084"/>
+            <a:ext cx="8549818" cy="369333"/>
+            <a:chOff x="1821092" y="5013662"/>
+            <a:chExt cx="8549818" cy="369333"/>
+          </a:xfrm>
+        </p:grpSpPr>
+        <p:sp>
+          <p:nvSpPr>
+            <p:cNvPr id="16" name="TextBox 15">
+              <a:extLst>
+                <a:ext uri="{FF2B5EF4-FFF2-40B4-BE49-F238E27FC236}">
+                  <a16:creationId xmlns:a16="http://schemas.microsoft.com/office/drawing/2014/main" id="{C028B60D-9522-42C1-9446-AD9C1A6F17A5}"/>
+                </a:ext>
+              </a:extLst>
+            </p:cNvPr>
+            <p:cNvSpPr txBox="1"/>
+            <p:nvPr/>
+          </p:nvSpPr>
+          <p:spPr>
+            <a:xfrm>
+              <a:off x="1821092" y="5013663"/>
+              <a:ext cx="3983805" cy="369332"/>
+            </a:xfrm>
+            <a:prstGeom prst="rect">
+              <a:avLst/>
+            </a:prstGeom>
+            <a:noFill/>
+          </p:spPr>
+          <p:txBody>
+            <a:bodyPr wrap="square">
+              <a:spAutoFit/>
+            </a:bodyPr>
+            <a:lstStyle/>
+            <a:p>
+              <a:pPr lvl="1"/>
+              <a:r>
+                <a:rPr lang="en-US" dirty="0">
+                  <a:cs typeface="Arial" panose="020B0604020202020204" pitchFamily="34" charset="0"/>
+                </a:rPr>
+                <a:t>Number of presence patches: 8 </a:t>
+              </a:r>
+            </a:p>
+          </p:txBody>
+        </p:sp>
+        <p:sp>
+          <p:nvSpPr>
+            <p:cNvPr id="17" name="TextBox 16">
+              <a:extLst>
+                <a:ext uri="{FF2B5EF4-FFF2-40B4-BE49-F238E27FC236}">
+                  <a16:creationId xmlns:a16="http://schemas.microsoft.com/office/drawing/2014/main" id="{DC08A7A1-91F9-44BD-BB29-BBAFCB6EE250}"/>
+                </a:ext>
+              </a:extLst>
+            </p:cNvPr>
+            <p:cNvSpPr txBox="1"/>
+            <p:nvPr/>
+          </p:nvSpPr>
+          <p:spPr>
+            <a:xfrm>
+              <a:off x="6387105" y="5013662"/>
+              <a:ext cx="3983805" cy="369332"/>
+            </a:xfrm>
+            <a:prstGeom prst="rect">
+              <a:avLst/>
+            </a:prstGeom>
+            <a:noFill/>
+          </p:spPr>
+          <p:txBody>
+            <a:bodyPr wrap="square">
+              <a:spAutoFit/>
+            </a:bodyPr>
+            <a:lstStyle/>
+            <a:p>
+              <a:pPr lvl="1"/>
+              <a:r>
+                <a:rPr lang="en-US" dirty="0">
+                  <a:cs typeface="Arial" panose="020B0604020202020204" pitchFamily="34" charset="0"/>
+                </a:rPr>
+                <a:t>Number of presence patches: 8 </a:t>
+              </a:r>
+            </a:p>
+          </p:txBody>
+        </p:sp>
+      </p:grpSp>
     </p:spTree>
     <p:extLst>
       <p:ext uri="{BB962C8B-B14F-4D97-AF65-F5344CB8AC3E}">
-        <p14:creationId xmlns:p14="http://schemas.microsoft.com/office/powerpoint/2010/main" val="1048601941"/>
+        <p14:creationId xmlns:p14="http://schemas.microsoft.com/office/powerpoint/2010/main" val="850377887"/>
       </p:ext>
     </p:extLst>
   </p:cSld>
@@ -19929,7 +19982,7 @@
                                           </p:stCondLst>
                                         </p:cTn>
                                         <p:tgtEl>
-                                          <p:spTgt spid="9"/>
+                                          <p:spTgt spid="15"/>
                                         </p:tgtEl>
                                         <p:attrNameLst>
                                           <p:attrName>style.visibility</p:attrName>
@@ -19992,42 +20045,70 @@
       </p:grpSpPr>
       <p:sp>
         <p:nvSpPr>
-          <p:cNvPr id="3" name="Content Placeholder 2">
+          <p:cNvPr id="4" name="Rectangle 2">
             <a:extLst>
               <a:ext uri="{FF2B5EF4-FFF2-40B4-BE49-F238E27FC236}">
-                <a16:creationId xmlns:a16="http://schemas.microsoft.com/office/drawing/2014/main" id="{6D3BCC15-CBF3-2B13-6B08-F8B4E379EE95}"/>
+                <a16:creationId xmlns:a16="http://schemas.microsoft.com/office/drawing/2014/main" id="{F822B618-6203-622E-D0D1-CDD367AEB209}"/>
               </a:ext>
             </a:extLst>
           </p:cNvPr>
           <p:cNvSpPr>
-            <a:spLocks noGrp="1"/>
+            <a:spLocks noChangeArrowheads="1"/>
           </p:cNvSpPr>
-          <p:nvPr>
-            <p:ph idx="1"/>
-          </p:nvPr>
+          <p:nvPr/>
         </p:nvSpPr>
-        <p:spPr>
+        <p:spPr bwMode="auto">
           <a:xfrm>
-            <a:off x="227635" y="967251"/>
-            <a:ext cx="11736729" cy="833133"/>
+            <a:off x="0" y="0"/>
+            <a:ext cx="12192000" cy="457200"/>
           </a:xfrm>
+          <a:prstGeom prst="rect">
+            <a:avLst/>
+          </a:prstGeom>
+          <a:noFill/>
+          <a:ln>
+            <a:noFill/>
+          </a:ln>
+          <a:effectLst/>
+          <a:extLst>
+            <a:ext uri="{909E8E84-426E-40DD-AFC4-6F175D3DCCD1}">
+              <a14:hiddenFill xmlns:a14="http://schemas.microsoft.com/office/drawing/2010/main">
+                <a:solidFill>
+                  <a:schemeClr val="accent1"/>
+                </a:solidFill>
+              </a14:hiddenFill>
+            </a:ext>
+            <a:ext uri="{91240B29-F687-4F45-9708-019B960494DF}">
+              <a14:hiddenLine xmlns:a14="http://schemas.microsoft.com/office/drawing/2010/main" w="9525">
+                <a:solidFill>
+                  <a:schemeClr val="tx1"/>
+                </a:solidFill>
+                <a:miter lim="800000"/>
+                <a:headEnd/>
+                <a:tailEnd/>
+              </a14:hiddenLine>
+            </a:ext>
+            <a:ext uri="{AF507438-7753-43E0-B8FC-AC1667EBCBE1}">
+              <a14:hiddenEffects xmlns:a14="http://schemas.microsoft.com/office/drawing/2010/main">
+                <a:effectLst>
+                  <a:outerShdw dist="35921" dir="2700000" algn="ctr" rotWithShape="0">
+                    <a:schemeClr val="bg2"/>
+                  </a:outerShdw>
+                </a:effectLst>
+              </a14:hiddenEffects>
+            </a:ext>
+          </a:extLst>
         </p:spPr>
         <p:txBody>
-          <a:bodyPr>
-            <a:normAutofit/>
+          <a:bodyPr vert="horz" wrap="none" lIns="91440" tIns="45720" rIns="91440" bIns="45720" numCol="1" anchor="ctr" anchorCtr="0" compatLnSpc="1">
+            <a:prstTxWarp prst="textNoShape">
+              <a:avLst/>
+            </a:prstTxWarp>
+            <a:spAutoFit/>
           </a:bodyPr>
           <a:lstStyle/>
           <a:p>
-            <a:pPr marL="0" indent="0">
-              <a:buNone/>
-            </a:pPr>
-            <a:r>
-              <a:rPr lang="en-US" sz="2400" b="1" dirty="0">
-                <a:latin typeface="Arial" panose="020B0604020202020204" pitchFamily="34" charset="0"/>
-                <a:cs typeface="Arial" panose="020B0604020202020204" pitchFamily="34" charset="0"/>
-              </a:rPr>
-              <a:t>What is the change in number of patches and size of presence during the time interval of Initial Time and Final Time? </a:t>
-            </a:r>
+            <a:endParaRPr lang="en-US"/>
           </a:p>
         </p:txBody>
       </p:sp>
@@ -20062,10 +20143,10 @@
       </p:sp>
       <p:pic>
         <p:nvPicPr>
-          <p:cNvPr id="5" name="Picture 4">
+          <p:cNvPr id="11" name="Picture 10">
             <a:extLst>
               <a:ext uri="{FF2B5EF4-FFF2-40B4-BE49-F238E27FC236}">
-                <a16:creationId xmlns:a16="http://schemas.microsoft.com/office/drawing/2014/main" id="{E71E970C-2657-7B9A-4B3D-DF53F02B5131}"/>
+                <a16:creationId xmlns:a16="http://schemas.microsoft.com/office/drawing/2014/main" id="{5C100582-99ED-4E51-B6A4-6747B12E8D42}"/>
               </a:ext>
             </a:extLst>
           </p:cNvPr>
@@ -20087,7 +20168,7 @@
         </p:blipFill>
         <p:spPr>
           <a:xfrm>
-            <a:off x="1337241" y="2300895"/>
+            <a:off x="1553141" y="1709519"/>
             <a:ext cx="9351344" cy="2731268"/>
           </a:xfrm>
           <a:prstGeom prst="rect">
@@ -20095,156 +20176,12 @@
           </a:prstGeom>
         </p:spPr>
       </p:pic>
-      <p:sp>
-        <p:nvSpPr>
-          <p:cNvPr id="12" name="TextBox 11">
-            <a:extLst>
-              <a:ext uri="{FF2B5EF4-FFF2-40B4-BE49-F238E27FC236}">
-                <a16:creationId xmlns:a16="http://schemas.microsoft.com/office/drawing/2014/main" id="{85E0F6C2-1DD2-C01B-E5AF-52B34359E651}"/>
-              </a:ext>
-            </a:extLst>
-          </p:cNvPr>
-          <p:cNvSpPr txBox="1"/>
-          <p:nvPr/>
-        </p:nvSpPr>
-        <p:spPr>
-          <a:xfrm>
-            <a:off x="1821092" y="5013663"/>
-            <a:ext cx="3983805" cy="646331"/>
-          </a:xfrm>
-          <a:prstGeom prst="rect">
-            <a:avLst/>
-          </a:prstGeom>
-          <a:noFill/>
-        </p:spPr>
-        <p:txBody>
-          <a:bodyPr wrap="square">
-            <a:spAutoFit/>
-          </a:bodyPr>
-          <a:lstStyle/>
-          <a:p>
-            <a:pPr lvl="1"/>
-            <a:r>
-              <a:rPr lang="en-US">
-                <a:cs typeface="Arial" panose="020B0604020202020204" pitchFamily="34" charset="0"/>
-              </a:rPr>
-              <a:t>Number of presence patches: 8 </a:t>
-            </a:r>
-          </a:p>
-          <a:p>
-            <a:pPr lvl="1"/>
-            <a:r>
-              <a:rPr lang="en-US">
-                <a:cs typeface="Arial" panose="020B0604020202020204" pitchFamily="34" charset="0"/>
-              </a:rPr>
-              <a:t>Size of presence: 92 pixels</a:t>
-            </a:r>
-            <a:endParaRPr lang="en-US"/>
-          </a:p>
-        </p:txBody>
-      </p:sp>
-      <p:sp>
-        <p:nvSpPr>
-          <p:cNvPr id="13" name="TextBox 12">
-            <a:extLst>
-              <a:ext uri="{FF2B5EF4-FFF2-40B4-BE49-F238E27FC236}">
-                <a16:creationId xmlns:a16="http://schemas.microsoft.com/office/drawing/2014/main" id="{BF8B60E7-16F9-A06D-8FA9-2AD860177ABD}"/>
-              </a:ext>
-            </a:extLst>
-          </p:cNvPr>
-          <p:cNvSpPr txBox="1"/>
-          <p:nvPr/>
-        </p:nvSpPr>
-        <p:spPr>
-          <a:xfrm>
-            <a:off x="6387105" y="5013662"/>
-            <a:ext cx="3983805" cy="646331"/>
-          </a:xfrm>
-          <a:prstGeom prst="rect">
-            <a:avLst/>
-          </a:prstGeom>
-          <a:noFill/>
-        </p:spPr>
-        <p:txBody>
-          <a:bodyPr wrap="square">
-            <a:spAutoFit/>
-          </a:bodyPr>
-          <a:lstStyle/>
-          <a:p>
-            <a:pPr lvl="1"/>
-            <a:r>
-              <a:rPr lang="en-US">
-                <a:cs typeface="Arial" panose="020B0604020202020204" pitchFamily="34" charset="0"/>
-              </a:rPr>
-              <a:t>Number of presence patches: 8 </a:t>
-            </a:r>
-          </a:p>
-          <a:p>
-            <a:pPr lvl="1"/>
-            <a:r>
-              <a:rPr lang="en-US">
-                <a:cs typeface="Arial" panose="020B0604020202020204" pitchFamily="34" charset="0"/>
-              </a:rPr>
-              <a:t>Size of presence: 92 pixels</a:t>
-            </a:r>
-            <a:endParaRPr lang="en-US"/>
-          </a:p>
-        </p:txBody>
-      </p:sp>
-      <p:sp>
-        <p:nvSpPr>
-          <p:cNvPr id="15" name="TextBox 14">
-            <a:extLst>
-              <a:ext uri="{FF2B5EF4-FFF2-40B4-BE49-F238E27FC236}">
-                <a16:creationId xmlns:a16="http://schemas.microsoft.com/office/drawing/2014/main" id="{5B82F88D-ACBE-7198-3A68-7F0D65EE3936}"/>
-              </a:ext>
-            </a:extLst>
-          </p:cNvPr>
-          <p:cNvSpPr txBox="1"/>
-          <p:nvPr/>
-        </p:nvSpPr>
-        <p:spPr>
-          <a:xfrm>
-            <a:off x="3067051" y="6033184"/>
-            <a:ext cx="5134510" cy="646331"/>
-          </a:xfrm>
-          <a:prstGeom prst="rect">
-            <a:avLst/>
-          </a:prstGeom>
-          <a:noFill/>
-        </p:spPr>
-        <p:txBody>
-          <a:bodyPr wrap="square">
-            <a:spAutoFit/>
-          </a:bodyPr>
-          <a:lstStyle/>
-          <a:p>
-            <a:pPr lvl="1" algn="ctr"/>
-            <a:r>
-              <a:rPr lang="en-US" b="1">
-                <a:cs typeface="Arial" panose="020B0604020202020204" pitchFamily="34" charset="0"/>
-              </a:rPr>
-              <a:t>Net change in number of patches: 0</a:t>
-            </a:r>
-          </a:p>
-          <a:p>
-            <a:pPr lvl="1" algn="ctr"/>
-            <a:r>
-              <a:rPr lang="en-US" b="1">
-                <a:cs typeface="Arial" panose="020B0604020202020204" pitchFamily="34" charset="0"/>
-              </a:rPr>
-              <a:t>Net change in size of presence: 0  </a:t>
-            </a:r>
-            <a:endParaRPr lang="en-US" b="1"/>
-          </a:p>
-        </p:txBody>
-      </p:sp>
       <p:grpSp>
         <p:nvGrpSpPr>
-          <p:cNvPr id="10" name="Group 9">
+          <p:cNvPr id="7" name="Group 6">
             <a:extLst>
               <a:ext uri="{FF2B5EF4-FFF2-40B4-BE49-F238E27FC236}">
-                <a16:creationId xmlns:a16="http://schemas.microsoft.com/office/drawing/2014/main" id="{45E3F28C-9E3A-4783-9201-7574C1DD5DF0}"/>
+                <a16:creationId xmlns:a16="http://schemas.microsoft.com/office/drawing/2014/main" id="{C7F78D77-53BC-423B-9B8E-4A78CF1FFA47}"/>
               </a:ext>
             </a:extLst>
           </p:cNvPr>
@@ -20261,10 +20198,10 @@
         </p:grpSpPr>
         <p:sp>
           <p:nvSpPr>
-            <p:cNvPr id="11" name="Title 1">
+            <p:cNvPr id="8" name="Title 1">
               <a:extLst>
                 <a:ext uri="{FF2B5EF4-FFF2-40B4-BE49-F238E27FC236}">
-                  <a16:creationId xmlns:a16="http://schemas.microsoft.com/office/drawing/2014/main" id="{791F9B1A-48E6-4792-85A3-5DF47EF06809}"/>
+                  <a16:creationId xmlns:a16="http://schemas.microsoft.com/office/drawing/2014/main" id="{D842E2B4-4CD9-41B8-8A8D-95038876F444}"/>
                 </a:ext>
               </a:extLst>
             </p:cNvPr>
@@ -20321,10 +20258,10 @@
         </p:sp>
         <p:sp>
           <p:nvSpPr>
-            <p:cNvPr id="16" name="Rectangle 15">
+            <p:cNvPr id="9" name="Rectangle 8">
               <a:extLst>
                 <a:ext uri="{FF2B5EF4-FFF2-40B4-BE49-F238E27FC236}">
-                  <a16:creationId xmlns:a16="http://schemas.microsoft.com/office/drawing/2014/main" id="{DF1AB4E1-9ADE-4B5D-A534-13D32ED4B18E}"/>
+                  <a16:creationId xmlns:a16="http://schemas.microsoft.com/office/drawing/2014/main" id="{3AA204A0-6EB6-4ACE-974E-5D8C9381772C}"/>
                 </a:ext>
               </a:extLst>
             </p:cNvPr>
@@ -20362,10 +20299,10 @@
         </p:sp>
         <p:sp>
           <p:nvSpPr>
-            <p:cNvPr id="17" name="Rectangle 16">
+            <p:cNvPr id="12" name="Rectangle 11">
               <a:extLst>
                 <a:ext uri="{FF2B5EF4-FFF2-40B4-BE49-F238E27FC236}">
-                  <a16:creationId xmlns:a16="http://schemas.microsoft.com/office/drawing/2014/main" id="{0E51912D-0A07-432A-B771-DAE0BECFF7CB}"/>
+                  <a16:creationId xmlns:a16="http://schemas.microsoft.com/office/drawing/2014/main" id="{3C0DA6DC-BD03-4876-BFEC-2542026A963E}"/>
                 </a:ext>
               </a:extLst>
             </p:cNvPr>
@@ -20417,10 +20354,195 @@
           </p:txBody>
         </p:sp>
       </p:grpSp>
+      <p:sp>
+        <p:nvSpPr>
+          <p:cNvPr id="14" name="TextBox 13">
+            <a:extLst>
+              <a:ext uri="{FF2B5EF4-FFF2-40B4-BE49-F238E27FC236}">
+                <a16:creationId xmlns:a16="http://schemas.microsoft.com/office/drawing/2014/main" id="{BD900350-09BD-4196-8E2D-751D5040B7CF}"/>
+              </a:ext>
+            </a:extLst>
+          </p:cNvPr>
+          <p:cNvSpPr txBox="1"/>
+          <p:nvPr/>
+        </p:nvSpPr>
+        <p:spPr>
+          <a:xfrm>
+            <a:off x="192194" y="718131"/>
+            <a:ext cx="12473132" cy="830997"/>
+          </a:xfrm>
+          <a:prstGeom prst="rect">
+            <a:avLst/>
+          </a:prstGeom>
+          <a:noFill/>
+        </p:spPr>
+        <p:txBody>
+          <a:bodyPr wrap="square">
+            <a:spAutoFit/>
+          </a:bodyPr>
+          <a:lstStyle/>
+          <a:p>
+            <a:pPr marL="0" indent="0">
+              <a:buNone/>
+            </a:pPr>
+            <a:r>
+              <a:rPr lang="en-US" sz="2400" b="1" dirty="0">
+                <a:latin typeface="Arial" panose="020B0604020202020204" pitchFamily="34" charset="0"/>
+                <a:cs typeface="Arial" panose="020B0604020202020204" pitchFamily="34" charset="0"/>
+              </a:rPr>
+              <a:t>What is the change in number of patches and size of presence during the time interval of Initial Time and Final Time? </a:t>
+            </a:r>
+          </a:p>
+        </p:txBody>
+      </p:sp>
+      <p:sp>
+        <p:nvSpPr>
+          <p:cNvPr id="13" name="TextBox 12">
+            <a:extLst>
+              <a:ext uri="{FF2B5EF4-FFF2-40B4-BE49-F238E27FC236}">
+                <a16:creationId xmlns:a16="http://schemas.microsoft.com/office/drawing/2014/main" id="{EDEF73BA-EE71-46EB-8073-CDCA3A5C1612}"/>
+              </a:ext>
+            </a:extLst>
+          </p:cNvPr>
+          <p:cNvSpPr txBox="1"/>
+          <p:nvPr/>
+        </p:nvSpPr>
+        <p:spPr>
+          <a:xfrm>
+            <a:off x="1821092" y="4440787"/>
+            <a:ext cx="3983805" cy="646331"/>
+          </a:xfrm>
+          <a:prstGeom prst="rect">
+            <a:avLst/>
+          </a:prstGeom>
+          <a:noFill/>
+        </p:spPr>
+        <p:txBody>
+          <a:bodyPr wrap="square">
+            <a:spAutoFit/>
+          </a:bodyPr>
+          <a:lstStyle/>
+          <a:p>
+            <a:pPr lvl="1"/>
+            <a:r>
+              <a:rPr lang="en-US" dirty="0">
+                <a:cs typeface="Arial" panose="020B0604020202020204" pitchFamily="34" charset="0"/>
+              </a:rPr>
+              <a:t>Number of presence patches: 8 </a:t>
+            </a:r>
+          </a:p>
+          <a:p>
+            <a:pPr lvl="1"/>
+            <a:r>
+              <a:rPr lang="en-US" dirty="0">
+                <a:cs typeface="Arial" panose="020B0604020202020204" pitchFamily="34" charset="0"/>
+              </a:rPr>
+              <a:t>Size of presence: 92 pixels</a:t>
+            </a:r>
+            <a:endParaRPr lang="en-US" dirty="0"/>
+          </a:p>
+        </p:txBody>
+      </p:sp>
+      <p:sp>
+        <p:nvSpPr>
+          <p:cNvPr id="18" name="TextBox 17">
+            <a:extLst>
+              <a:ext uri="{FF2B5EF4-FFF2-40B4-BE49-F238E27FC236}">
+                <a16:creationId xmlns:a16="http://schemas.microsoft.com/office/drawing/2014/main" id="{CBD6052A-8D20-4E39-B2FA-11154C0E63CC}"/>
+              </a:ext>
+            </a:extLst>
+          </p:cNvPr>
+          <p:cNvSpPr txBox="1"/>
+          <p:nvPr/>
+        </p:nvSpPr>
+        <p:spPr>
+          <a:xfrm>
+            <a:off x="6655054" y="4440787"/>
+            <a:ext cx="3983805" cy="646331"/>
+          </a:xfrm>
+          <a:prstGeom prst="rect">
+            <a:avLst/>
+          </a:prstGeom>
+          <a:noFill/>
+        </p:spPr>
+        <p:txBody>
+          <a:bodyPr wrap="square">
+            <a:spAutoFit/>
+          </a:bodyPr>
+          <a:lstStyle/>
+          <a:p>
+            <a:pPr lvl="1"/>
+            <a:r>
+              <a:rPr lang="en-US" dirty="0">
+                <a:cs typeface="Arial" panose="020B0604020202020204" pitchFamily="34" charset="0"/>
+              </a:rPr>
+              <a:t>Number of presence patches: 8 </a:t>
+            </a:r>
+          </a:p>
+          <a:p>
+            <a:pPr lvl="1"/>
+            <a:r>
+              <a:rPr lang="en-US" dirty="0">
+                <a:cs typeface="Arial" panose="020B0604020202020204" pitchFamily="34" charset="0"/>
+              </a:rPr>
+              <a:t>Size of presence: 92 pixels</a:t>
+            </a:r>
+            <a:endParaRPr lang="en-US" dirty="0"/>
+          </a:p>
+        </p:txBody>
+      </p:sp>
+      <p:sp>
+        <p:nvSpPr>
+          <p:cNvPr id="19" name="TextBox 18">
+            <a:extLst>
+              <a:ext uri="{FF2B5EF4-FFF2-40B4-BE49-F238E27FC236}">
+                <a16:creationId xmlns:a16="http://schemas.microsoft.com/office/drawing/2014/main" id="{A6554D2F-313E-4A59-BBE5-18F595853056}"/>
+              </a:ext>
+            </a:extLst>
+          </p:cNvPr>
+          <p:cNvSpPr txBox="1"/>
+          <p:nvPr/>
+        </p:nvSpPr>
+        <p:spPr>
+          <a:xfrm>
+            <a:off x="3133726" y="5493538"/>
+            <a:ext cx="5134510" cy="646331"/>
+          </a:xfrm>
+          <a:prstGeom prst="rect">
+            <a:avLst/>
+          </a:prstGeom>
+          <a:noFill/>
+        </p:spPr>
+        <p:txBody>
+          <a:bodyPr wrap="square">
+            <a:spAutoFit/>
+          </a:bodyPr>
+          <a:lstStyle/>
+          <a:p>
+            <a:pPr lvl="1" algn="ctr"/>
+            <a:r>
+              <a:rPr lang="en-US" b="1" dirty="0">
+                <a:cs typeface="Arial" panose="020B0604020202020204" pitchFamily="34" charset="0"/>
+              </a:rPr>
+              <a:t>Net change in number of patches: 0</a:t>
+            </a:r>
+          </a:p>
+          <a:p>
+            <a:pPr lvl="1" algn="ctr"/>
+            <a:r>
+              <a:rPr lang="en-US" b="1" dirty="0">
+                <a:cs typeface="Arial" panose="020B0604020202020204" pitchFamily="34" charset="0"/>
+              </a:rPr>
+              <a:t>Net change in size of presence: 0  </a:t>
+            </a:r>
+            <a:endParaRPr lang="en-US" b="1" dirty="0"/>
+          </a:p>
+        </p:txBody>
+      </p:sp>
     </p:spTree>
     <p:extLst>
       <p:ext uri="{BB962C8B-B14F-4D97-AF65-F5344CB8AC3E}">
-        <p14:creationId xmlns:p14="http://schemas.microsoft.com/office/powerpoint/2010/main" val="375661301"/>
+        <p14:creationId xmlns:p14="http://schemas.microsoft.com/office/powerpoint/2010/main" val="4051164810"/>
       </p:ext>
     </p:extLst>
   </p:cSld>
@@ -20461,7 +20583,7 @@
                                           </p:stCondLst>
                                         </p:cTn>
                                         <p:tgtEl>
-                                          <p:spTgt spid="15"/>
+                                          <p:spTgt spid="19"/>
                                         </p:tgtEl>
                                         <p:attrNameLst>
                                           <p:attrName>style.visibility</p:attrName>
@@ -20502,7 +20624,7 @@
       </p:par>
     </p:tnLst>
     <p:bldLst>
-      <p:bldP spid="15" grpId="0"/>
+      <p:bldP spid="19" grpId="0"/>
     </p:bldLst>
   </p:timing>
 </p:sld>
@@ -20874,7 +20996,7 @@
                 <a:latin typeface="Arial" panose="020B0604020202020204" pitchFamily="34" charset="0"/>
                 <a:cs typeface="Arial" panose="020B0604020202020204" pitchFamily="34" charset="0"/>
               </a:rPr>
-              <a:t>In the example map below, each change patch has a unique transition pattern</a:t>
+              <a:t>In the example map below, each change patch has a unique transition pattern.</a:t>
             </a:r>
           </a:p>
         </p:txBody>
@@ -24400,6 +24522,23 @@
 </file>
 
 <file path=customXml/item1.xml><?xml version="1.0" encoding="utf-8"?>
+<p:properties xmlns:p="http://schemas.microsoft.com/office/2006/metadata/properties" xmlns:xsi="http://www.w3.org/2001/XMLSchema-instance" xmlns:pc="http://schemas.microsoft.com/office/infopath/2007/PartnerControls">
+  <documentManagement>
+    <_activity xmlns="b70da884-86bb-4f87-bb7b-c87fdd365207" xsi:nil="true"/>
+  </documentManagement>
+</p:properties>
+</file>
+
+<file path=customXml/item2.xml><?xml version="1.0" encoding="utf-8"?>
+<?mso-contentType ?>
+<FormTemplates xmlns="http://schemas.microsoft.com/sharepoint/v3/contenttype/forms">
+  <Display>DocumentLibraryForm</Display>
+  <Edit>DocumentLibraryForm</Edit>
+  <New>DocumentLibraryForm</New>
+</FormTemplates>
+</file>
+
+<file path=customXml/item3.xml><?xml version="1.0" encoding="utf-8"?>
 <ct:contentTypeSchema xmlns:ct="http://schemas.microsoft.com/office/2006/metadata/contentType" xmlns:ma="http://schemas.microsoft.com/office/2006/metadata/properties/metaAttributes" ct:_="" ma:_="" ma:contentTypeName="Document" ma:contentTypeID="0x010100DB4CBB89BD7D6445BB7F862D8899099E" ma:contentTypeVersion="18" ma:contentTypeDescription="Create a new document." ma:contentTypeScope="" ma:versionID="2b3be570f71b7d62e7132c7eced99c6f">
   <xsd:schema xmlns:xsd="http://www.w3.org/2001/XMLSchema" xmlns:xs="http://www.w3.org/2001/XMLSchema" xmlns:p="http://schemas.microsoft.com/office/2006/metadata/properties" xmlns:ns3="b70da884-86bb-4f87-bb7b-c87fdd365207" xmlns:ns4="e8ea0c43-9cc4-434f-8c4f-3f30e817cc6a" targetNamespace="http://schemas.microsoft.com/office/2006/metadata/properties" ma:root="true" ma:fieldsID="86625aee51aae36b45c39a0385e969ff" ns3:_="" ns4:_="">
     <xsd:import namespace="b70da884-86bb-4f87-bb7b-c87fdd365207"/>
@@ -24652,24 +24791,32 @@
 </ct:contentTypeSchema>
 </file>
 
-<file path=customXml/item2.xml><?xml version="1.0" encoding="utf-8"?>
-<?mso-contentType ?>
-<FormTemplates xmlns="http://schemas.microsoft.com/sharepoint/v3/contenttype/forms">
-  <Display>DocumentLibraryForm</Display>
-  <Edit>DocumentLibraryForm</Edit>
-  <New>DocumentLibraryForm</New>
-</FormTemplates>
+<file path=customXml/itemProps1.xml><?xml version="1.0" encoding="utf-8"?>
+<ds:datastoreItem xmlns:ds="http://schemas.openxmlformats.org/officeDocument/2006/customXml" ds:itemID="{8A5F1F33-C96A-467A-97C7-119A58A3A67E}">
+  <ds:schemaRefs>
+    <ds:schemaRef ds:uri="http://purl.org/dc/terms/"/>
+    <ds:schemaRef ds:uri="http://www.w3.org/XML/1998/namespace"/>
+    <ds:schemaRef ds:uri="e8ea0c43-9cc4-434f-8c4f-3f30e817cc6a"/>
+    <ds:schemaRef ds:uri="http://purl.org/dc/elements/1.1/"/>
+    <ds:schemaRef ds:uri="http://schemas.openxmlformats.org/package/2006/metadata/core-properties"/>
+    <ds:schemaRef ds:uri="http://schemas.microsoft.com/office/2006/documentManagement/types"/>
+    <ds:schemaRef ds:uri="http://purl.org/dc/dcmitype/"/>
+    <ds:schemaRef ds:uri="http://schemas.microsoft.com/office/infopath/2007/PartnerControls"/>
+    <ds:schemaRef ds:uri="b70da884-86bb-4f87-bb7b-c87fdd365207"/>
+    <ds:schemaRef ds:uri="http://schemas.microsoft.com/office/2006/metadata/properties"/>
+  </ds:schemaRefs>
+</ds:datastoreItem>
 </file>
 
-<file path=customXml/item3.xml><?xml version="1.0" encoding="utf-8"?>
-<p:properties xmlns:p="http://schemas.microsoft.com/office/2006/metadata/properties" xmlns:xsi="http://www.w3.org/2001/XMLSchema-instance" xmlns:pc="http://schemas.microsoft.com/office/infopath/2007/PartnerControls">
-  <documentManagement>
-    <_activity xmlns="b70da884-86bb-4f87-bb7b-c87fdd365207" xsi:nil="true"/>
-  </documentManagement>
-</p:properties>
+<file path=customXml/itemProps2.xml><?xml version="1.0" encoding="utf-8"?>
+<ds:datastoreItem xmlns:ds="http://schemas.openxmlformats.org/officeDocument/2006/customXml" ds:itemID="{4B847C2B-ACB2-4F0E-BBEB-402672B88F8E}">
+  <ds:schemaRefs>
+    <ds:schemaRef ds:uri="http://schemas.microsoft.com/sharepoint/v3/contenttype/forms"/>
+  </ds:schemaRefs>
+</ds:datastoreItem>
 </file>
 
-<file path=customXml/itemProps1.xml><?xml version="1.0" encoding="utf-8"?>
+<file path=customXml/itemProps3.xml><?xml version="1.0" encoding="utf-8"?>
 <ds:datastoreItem xmlns:ds="http://schemas.openxmlformats.org/officeDocument/2006/customXml" ds:itemID="{D4DF304E-AA82-4B25-B5D7-ECE40D9A4C76}">
   <ds:schemaRefs>
     <ds:schemaRef ds:uri="http://schemas.microsoft.com/office/2006/metadata/contentType"/>
@@ -24686,29 +24833,4 @@
     <ds:schemaRef ds:uri="http://schemas.microsoft.com/internal/obd"/>
   </ds:schemaRefs>
 </ds:datastoreItem>
-</file>
-
-<file path=customXml/itemProps2.xml><?xml version="1.0" encoding="utf-8"?>
-<ds:datastoreItem xmlns:ds="http://schemas.openxmlformats.org/officeDocument/2006/customXml" ds:itemID="{4B847C2B-ACB2-4F0E-BBEB-402672B88F8E}">
-  <ds:schemaRefs>
-    <ds:schemaRef ds:uri="http://schemas.microsoft.com/sharepoint/v3/contenttype/forms"/>
-  </ds:schemaRefs>
-</ds:datastoreItem>
-</file>
-
-<file path=customXml/itemProps3.xml><?xml version="1.0" encoding="utf-8"?>
-<ds:datastoreItem xmlns:ds="http://schemas.openxmlformats.org/officeDocument/2006/customXml" ds:itemID="{8A5F1F33-C96A-467A-97C7-119A58A3A67E}">
-  <ds:schemaRefs>
-    <ds:schemaRef ds:uri="http://purl.org/dc/terms/"/>
-    <ds:schemaRef ds:uri="http://www.w3.org/XML/1998/namespace"/>
-    <ds:schemaRef ds:uri="e8ea0c43-9cc4-434f-8c4f-3f30e817cc6a"/>
-    <ds:schemaRef ds:uri="http://purl.org/dc/elements/1.1/"/>
-    <ds:schemaRef ds:uri="http://schemas.openxmlformats.org/package/2006/metadata/core-properties"/>
-    <ds:schemaRef ds:uri="http://schemas.microsoft.com/office/2006/documentManagement/types"/>
-    <ds:schemaRef ds:uri="http://purl.org/dc/dcmitype/"/>
-    <ds:schemaRef ds:uri="http://schemas.microsoft.com/office/infopath/2007/PartnerControls"/>
-    <ds:schemaRef ds:uri="b70da884-86bb-4f87-bb7b-c87fdd365207"/>
-    <ds:schemaRef ds:uri="http://schemas.microsoft.com/office/2006/metadata/properties"/>
-  </ds:schemaRefs>
-</ds:datastoreItem>
 </file>
--- a/assets/slides/workshop_DynamicPATCH.pptx
+++ b/assets/slides/workshop_DynamicPATCH.pptx
@@ -134,6 +134,22 @@
 <file path=ppt/changesInfos/changesInfo1.xml><?xml version="1.0" encoding="utf-8"?>
 <pc:chgInfo xmlns:a="http://schemas.openxmlformats.org/drawingml/2006/main" xmlns:r="http://schemas.openxmlformats.org/officeDocument/2006/relationships" xmlns:ac="http://schemas.microsoft.com/office/drawing/2013/main/command" xmlns:pc="http://schemas.microsoft.com/office/powerpoint/2013/main/command">
   <pc:docChgLst>
+    <pc:chgData name="Zhang, Aiyin" userId="6984d0e4-55fb-4bdb-aa49-e04b2dfb6feb" providerId="ADAL" clId="{8CA982B0-B56B-4CCB-AE4A-F5DE361E9A3F}"/>
+    <pc:docChg chg="addSld delSld modSld sldOrd">
+      <pc:chgData name="Zhang, Aiyin" userId="6984d0e4-55fb-4bdb-aa49-e04b2dfb6feb" providerId="ADAL" clId="{8CA982B0-B56B-4CCB-AE4A-F5DE361E9A3F}" dt="2026-10-01T21:58:09.331" v="3" actId="47"/>
+      <pc:docMkLst>
+        <pc:docMk/>
+      </pc:docMkLst>
+      <pc:sldChg chg="new del ord">
+        <pc:chgData name="Zhang, Aiyin" userId="6984d0e4-55fb-4bdb-aa49-e04b2dfb6feb" providerId="ADAL" clId="{8CA982B0-B56B-4CCB-AE4A-F5DE361E9A3F}" dt="2026-10-01T21:58:09.331" v="3" actId="47"/>
+        <pc:sldMkLst>
+          <pc:docMk/>
+          <pc:sldMk cId="1461322911" sldId="762"/>
+        </pc:sldMkLst>
+      </pc:sldChg>
+    </pc:docChg>
+  </pc:docChgLst>
+  <pc:docChgLst>
     <pc:chgData name="Zhang, Aiyin" userId="6984d0e4-55fb-4bdb-aa49-e04b2dfb6feb" providerId="ADAL" clId="{5B75A0BE-F550-4DA7-ADD9-C5D08B16DEF0}"/>
     <pc:docChg chg="undo custSel addSld delSld modSld sldOrd">
       <pc:chgData name="Zhang, Aiyin" userId="6984d0e4-55fb-4bdb-aa49-e04b2dfb6feb" providerId="ADAL" clId="{5B75A0BE-F550-4DA7-ADD9-C5D08B16DEF0}" dt="2026-09-30T22:17:16.476" v="771" actId="113"/>
@@ -154,20 +170,6 @@
             <ac:spMk id="17" creationId="{BE795A33-CD40-4411-81B2-AAFBDD491CA0}"/>
           </ac:spMkLst>
         </pc:spChg>
-      </pc:sldChg>
-      <pc:sldChg chg="del">
-        <pc:chgData name="Zhang, Aiyin" userId="6984d0e4-55fb-4bdb-aa49-e04b2dfb6feb" providerId="ADAL" clId="{5B75A0BE-F550-4DA7-ADD9-C5D08B16DEF0}" dt="2026-09-29T20:56:55.809" v="77" actId="47"/>
-        <pc:sldMkLst>
-          <pc:docMk/>
-          <pc:sldMk cId="3310198806" sldId="408"/>
-        </pc:sldMkLst>
-      </pc:sldChg>
-      <pc:sldChg chg="del">
-        <pc:chgData name="Zhang, Aiyin" userId="6984d0e4-55fb-4bdb-aa49-e04b2dfb6feb" providerId="ADAL" clId="{5B75A0BE-F550-4DA7-ADD9-C5D08B16DEF0}" dt="2026-09-29T20:55:36.872" v="71" actId="47"/>
-        <pc:sldMkLst>
-          <pc:docMk/>
-          <pc:sldMk cId="2293237554" sldId="411"/>
-        </pc:sldMkLst>
       </pc:sldChg>
       <pc:sldChg chg="addSp delSp modSp add del mod modShow">
         <pc:chgData name="Zhang, Aiyin" userId="6984d0e4-55fb-4bdb-aa49-e04b2dfb6feb" providerId="ADAL" clId="{5B75A0BE-F550-4DA7-ADD9-C5D08B16DEF0}" dt="2026-09-30T22:16:35.116" v="767" actId="164"/>
@@ -481,20 +483,6 @@
           </ac:spMkLst>
         </pc:spChg>
       </pc:sldChg>
-      <pc:sldChg chg="del">
-        <pc:chgData name="Zhang, Aiyin" userId="6984d0e4-55fb-4bdb-aa49-e04b2dfb6feb" providerId="ADAL" clId="{5B75A0BE-F550-4DA7-ADD9-C5D08B16DEF0}" dt="2026-09-29T20:56:37.121" v="75" actId="47"/>
-        <pc:sldMkLst>
-          <pc:docMk/>
-          <pc:sldMk cId="853861621" sldId="725"/>
-        </pc:sldMkLst>
-      </pc:sldChg>
-      <pc:sldChg chg="del">
-        <pc:chgData name="Zhang, Aiyin" userId="6984d0e4-55fb-4bdb-aa49-e04b2dfb6feb" providerId="ADAL" clId="{5B75A0BE-F550-4DA7-ADD9-C5D08B16DEF0}" dt="2026-09-29T20:56:38.407" v="76" actId="47"/>
-        <pc:sldMkLst>
-          <pc:docMk/>
-          <pc:sldMk cId="3654477975" sldId="727"/>
-        </pc:sldMkLst>
-      </pc:sldChg>
       <pc:sldChg chg="modSp mod">
         <pc:chgData name="Zhang, Aiyin" userId="6984d0e4-55fb-4bdb-aa49-e04b2dfb6feb" providerId="ADAL" clId="{5B75A0BE-F550-4DA7-ADD9-C5D08B16DEF0}" dt="2026-09-30T22:13:34.006" v="747" actId="20577"/>
         <pc:sldMkLst>
@@ -564,141 +552,18 @@
           </ac:spMkLst>
         </pc:spChg>
       </pc:sldChg>
-      <pc:sldChg chg="delSp modSp del mod">
-        <pc:chgData name="Zhang, Aiyin" userId="6984d0e4-55fb-4bdb-aa49-e04b2dfb6feb" providerId="ADAL" clId="{5B75A0BE-F550-4DA7-ADD9-C5D08B16DEF0}" dt="2026-09-29T20:54:33.591" v="70" actId="47"/>
-        <pc:sldMkLst>
-          <pc:docMk/>
-          <pc:sldMk cId="228995860" sldId="747"/>
-        </pc:sldMkLst>
-        <pc:spChg chg="mod">
-          <ac:chgData name="Zhang, Aiyin" userId="6984d0e4-55fb-4bdb-aa49-e04b2dfb6feb" providerId="ADAL" clId="{5B75A0BE-F550-4DA7-ADD9-C5D08B16DEF0}" dt="2026-09-29T20:41:55.063" v="1" actId="2711"/>
-          <ac:spMkLst>
-            <pc:docMk/>
-            <pc:sldMk cId="228995860" sldId="747"/>
-            <ac:spMk id="12" creationId="{A5111751-DF47-49DE-AC6F-3583941F8552}"/>
-          </ac:spMkLst>
-        </pc:spChg>
-        <pc:spChg chg="del mod">
-          <ac:chgData name="Zhang, Aiyin" userId="6984d0e4-55fb-4bdb-aa49-e04b2dfb6feb" providerId="ADAL" clId="{5B75A0BE-F550-4DA7-ADD9-C5D08B16DEF0}" dt="2026-09-29T20:43:15.124" v="18" actId="478"/>
-          <ac:spMkLst>
-            <pc:docMk/>
-            <pc:sldMk cId="228995860" sldId="747"/>
-            <ac:spMk id="13" creationId="{F73ECB83-6478-43C8-8877-5AB2BD67B8F3}"/>
-          </ac:spMkLst>
-        </pc:spChg>
-        <pc:spChg chg="del mod">
-          <ac:chgData name="Zhang, Aiyin" userId="6984d0e4-55fb-4bdb-aa49-e04b2dfb6feb" providerId="ADAL" clId="{5B75A0BE-F550-4DA7-ADD9-C5D08B16DEF0}" dt="2026-09-29T20:43:18.186" v="19" actId="478"/>
-          <ac:spMkLst>
-            <pc:docMk/>
-            <pc:sldMk cId="228995860" sldId="747"/>
-            <ac:spMk id="24" creationId="{89057F45-BE40-41E3-BBBE-6FD9621CD316}"/>
-          </ac:spMkLst>
-        </pc:spChg>
-        <pc:spChg chg="del">
-          <ac:chgData name="Zhang, Aiyin" userId="6984d0e4-55fb-4bdb-aa49-e04b2dfb6feb" providerId="ADAL" clId="{5B75A0BE-F550-4DA7-ADD9-C5D08B16DEF0}" dt="2026-09-29T20:43:20.801" v="20" actId="478"/>
-          <ac:spMkLst>
-            <pc:docMk/>
-            <pc:sldMk cId="228995860" sldId="747"/>
-            <ac:spMk id="28" creationId="{6A2059B0-B1D6-490F-BA1F-71F7EB4F62C3}"/>
-          </ac:spMkLst>
-        </pc:spChg>
-        <pc:picChg chg="del">
-          <ac:chgData name="Zhang, Aiyin" userId="6984d0e4-55fb-4bdb-aa49-e04b2dfb6feb" providerId="ADAL" clId="{5B75A0BE-F550-4DA7-ADD9-C5D08B16DEF0}" dt="2026-09-29T20:43:09.460" v="16" actId="478"/>
-          <ac:picMkLst>
-            <pc:docMk/>
-            <pc:sldMk cId="228995860" sldId="747"/>
-            <ac:picMk id="22" creationId="{B7FEFE25-B7CA-433F-A24E-A456B20496DA}"/>
-          </ac:picMkLst>
-        </pc:picChg>
-        <pc:picChg chg="del">
-          <ac:chgData name="Zhang, Aiyin" userId="6984d0e4-55fb-4bdb-aa49-e04b2dfb6feb" providerId="ADAL" clId="{5B75A0BE-F550-4DA7-ADD9-C5D08B16DEF0}" dt="2026-09-29T20:43:08.412" v="15" actId="478"/>
-          <ac:picMkLst>
-            <pc:docMk/>
-            <pc:sldMk cId="228995860" sldId="747"/>
-            <ac:picMk id="23" creationId="{D648C7F6-5CC1-4490-8C00-832A749946C4}"/>
-          </ac:picMkLst>
-        </pc:picChg>
-      </pc:sldChg>
-      <pc:sldChg chg="delSp del mod ord">
-        <pc:chgData name="Zhang, Aiyin" userId="6984d0e4-55fb-4bdb-aa49-e04b2dfb6feb" providerId="ADAL" clId="{5B75A0BE-F550-4DA7-ADD9-C5D08B16DEF0}" dt="2026-09-29T20:53:16.134" v="69" actId="47"/>
-        <pc:sldMkLst>
-          <pc:docMk/>
-          <pc:sldMk cId="1638443233" sldId="748"/>
-        </pc:sldMkLst>
-        <pc:spChg chg="del">
-          <ac:chgData name="Zhang, Aiyin" userId="6984d0e4-55fb-4bdb-aa49-e04b2dfb6feb" providerId="ADAL" clId="{5B75A0BE-F550-4DA7-ADD9-C5D08B16DEF0}" dt="2026-09-29T20:44:47.473" v="23" actId="478"/>
-          <ac:spMkLst>
-            <pc:docMk/>
-            <pc:sldMk cId="1638443233" sldId="748"/>
-            <ac:spMk id="13" creationId="{F73ECB83-6478-43C8-8877-5AB2BD67B8F3}"/>
-          </ac:spMkLst>
-        </pc:spChg>
-      </pc:sldChg>
-      <pc:sldChg chg="del">
-        <pc:chgData name="Zhang, Aiyin" userId="6984d0e4-55fb-4bdb-aa49-e04b2dfb6feb" providerId="ADAL" clId="{5B75A0BE-F550-4DA7-ADD9-C5D08B16DEF0}" dt="2026-09-29T20:56:56.296" v="78" actId="47"/>
-        <pc:sldMkLst>
-          <pc:docMk/>
-          <pc:sldMk cId="495588857" sldId="749"/>
-        </pc:sldMkLst>
-      </pc:sldChg>
-      <pc:sldChg chg="del">
-        <pc:chgData name="Zhang, Aiyin" userId="6984d0e4-55fb-4bdb-aa49-e04b2dfb6feb" providerId="ADAL" clId="{5B75A0BE-F550-4DA7-ADD9-C5D08B16DEF0}" dt="2026-09-29T20:56:57.346" v="79" actId="47"/>
-        <pc:sldMkLst>
-          <pc:docMk/>
-          <pc:sldMk cId="1625224250" sldId="750"/>
-        </pc:sldMkLst>
-      </pc:sldChg>
-      <pc:sldChg chg="del">
-        <pc:chgData name="Zhang, Aiyin" userId="6984d0e4-55fb-4bdb-aa49-e04b2dfb6feb" providerId="ADAL" clId="{5B75A0BE-F550-4DA7-ADD9-C5D08B16DEF0}" dt="2026-09-29T20:56:58.289" v="80" actId="47"/>
-        <pc:sldMkLst>
-          <pc:docMk/>
-          <pc:sldMk cId="2620123849" sldId="751"/>
-        </pc:sldMkLst>
-      </pc:sldChg>
       <pc:sldChg chg="addSp delSp modSp del mod addAnim delAnim modAnim">
         <pc:chgData name="Zhang, Aiyin" userId="6984d0e4-55fb-4bdb-aa49-e04b2dfb6feb" providerId="ADAL" clId="{5B75A0BE-F550-4DA7-ADD9-C5D08B16DEF0}" dt="2026-09-30T17:21:22.244" v="607" actId="47"/>
         <pc:sldMkLst>
           <pc:docMk/>
           <pc:sldMk cId="832248779" sldId="752"/>
         </pc:sldMkLst>
-        <pc:spChg chg="del">
-          <ac:chgData name="Zhang, Aiyin" userId="6984d0e4-55fb-4bdb-aa49-e04b2dfb6feb" providerId="ADAL" clId="{5B75A0BE-F550-4DA7-ADD9-C5D08B16DEF0}" dt="2026-09-29T21:22:58.906" v="87" actId="478"/>
-          <ac:spMkLst>
-            <pc:docMk/>
-            <pc:sldMk cId="832248779" sldId="752"/>
-            <ac:spMk id="21" creationId="{0FCDC5E6-90F1-430E-98D8-E434E2023D77}"/>
-          </ac:spMkLst>
-        </pc:spChg>
-        <pc:spChg chg="del">
-          <ac:chgData name="Zhang, Aiyin" userId="6984d0e4-55fb-4bdb-aa49-e04b2dfb6feb" providerId="ADAL" clId="{5B75A0BE-F550-4DA7-ADD9-C5D08B16DEF0}" dt="2026-09-29T21:22:58.906" v="87" actId="478"/>
-          <ac:spMkLst>
-            <pc:docMk/>
-            <pc:sldMk cId="832248779" sldId="752"/>
-            <ac:spMk id="22" creationId="{DFF71C89-FD94-4893-AE34-34F0ECDF0B38}"/>
-          </ac:spMkLst>
-        </pc:spChg>
-        <pc:spChg chg="del">
-          <ac:chgData name="Zhang, Aiyin" userId="6984d0e4-55fb-4bdb-aa49-e04b2dfb6feb" providerId="ADAL" clId="{5B75A0BE-F550-4DA7-ADD9-C5D08B16DEF0}" dt="2026-09-29T21:22:58.906" v="87" actId="478"/>
-          <ac:spMkLst>
-            <pc:docMk/>
-            <pc:sldMk cId="832248779" sldId="752"/>
-            <ac:spMk id="23" creationId="{F4B848FB-E959-4803-8B50-7918401FDC90}"/>
-          </ac:spMkLst>
-        </pc:spChg>
         <pc:spChg chg="add del mod topLvl">
           <ac:chgData name="Zhang, Aiyin" userId="6984d0e4-55fb-4bdb-aa49-e04b2dfb6feb" providerId="ADAL" clId="{5B75A0BE-F550-4DA7-ADD9-C5D08B16DEF0}" dt="2026-09-30T04:18:21.951" v="139" actId="478"/>
           <ac:spMkLst>
             <pc:docMk/>
             <pc:sldMk cId="832248779" sldId="752"/>
             <ac:spMk id="27" creationId="{4A15208E-B06D-46F4-AA27-B26C193BF571}"/>
-          </ac:spMkLst>
-        </pc:spChg>
-        <pc:spChg chg="del">
-          <ac:chgData name="Zhang, Aiyin" userId="6984d0e4-55fb-4bdb-aa49-e04b2dfb6feb" providerId="ADAL" clId="{5B75A0BE-F550-4DA7-ADD9-C5D08B16DEF0}" dt="2026-09-29T21:22:58.906" v="87" actId="478"/>
-          <ac:spMkLst>
-            <pc:docMk/>
-            <pc:sldMk cId="832248779" sldId="752"/>
-            <ac:spMk id="28" creationId="{E0552E51-0B60-4DFF-8748-04E0E394F0CE}"/>
           </ac:spMkLst>
         </pc:spChg>
         <pc:spChg chg="add del mod topLvl">
@@ -811,14 +676,6 @@
             <pc:docMk/>
             <pc:sldMk cId="832248779" sldId="752"/>
             <ac:spMk id="43" creationId="{93BB3A26-C4A7-47BC-B325-0651BA5EBC09}"/>
-          </ac:spMkLst>
-        </pc:spChg>
-        <pc:spChg chg="add del mod topLvl">
-          <ac:chgData name="Zhang, Aiyin" userId="6984d0e4-55fb-4bdb-aa49-e04b2dfb6feb" providerId="ADAL" clId="{5B75A0BE-F550-4DA7-ADD9-C5D08B16DEF0}" dt="2026-09-29T21:23:20.255" v="94" actId="478"/>
-          <ac:spMkLst>
-            <pc:docMk/>
-            <pc:sldMk cId="832248779" sldId="752"/>
-            <ac:spMk id="44" creationId="{39917704-24B5-4A30-8942-F47D5B534B28}"/>
           </ac:spMkLst>
         </pc:spChg>
         <pc:spChg chg="add del mod topLvl">
@@ -1021,14 +878,6 @@
             <ac:grpSpMk id="39" creationId="{A70E27AB-3292-49BF-98A0-C8BD2C609D3A}"/>
           </ac:grpSpMkLst>
         </pc:grpChg>
-        <pc:grpChg chg="add del">
-          <ac:chgData name="Zhang, Aiyin" userId="6984d0e4-55fb-4bdb-aa49-e04b2dfb6feb" providerId="ADAL" clId="{5B75A0BE-F550-4DA7-ADD9-C5D08B16DEF0}" dt="2026-09-29T21:23:15.760" v="92" actId="165"/>
-          <ac:grpSpMkLst>
-            <pc:docMk/>
-            <pc:sldMk cId="832248779" sldId="752"/>
-            <ac:grpSpMk id="43" creationId="{1F707E3D-A76C-4D6B-B819-A78B222E6E6A}"/>
-          </ac:grpSpMkLst>
-        </pc:grpChg>
         <pc:grpChg chg="add del mod ord">
           <ac:chgData name="Zhang, Aiyin" userId="6984d0e4-55fb-4bdb-aa49-e04b2dfb6feb" providerId="ADAL" clId="{5B75A0BE-F550-4DA7-ADD9-C5D08B16DEF0}" dt="2026-09-30T04:17:51.852" v="129" actId="478"/>
           <ac:grpSpMkLst>
@@ -1085,38 +934,6 @@
             <ac:grpSpMk id="83" creationId="{DCB9A5E2-4EE0-4CC7-80BB-5A067FAE3B7D}"/>
           </ac:grpSpMkLst>
         </pc:grpChg>
-        <pc:picChg chg="del">
-          <ac:chgData name="Zhang, Aiyin" userId="6984d0e4-55fb-4bdb-aa49-e04b2dfb6feb" providerId="ADAL" clId="{5B75A0BE-F550-4DA7-ADD9-C5D08B16DEF0}" dt="2026-09-29T21:22:58.906" v="87" actId="478"/>
-          <ac:picMkLst>
-            <pc:docMk/>
-            <pc:sldMk cId="832248779" sldId="752"/>
-            <ac:picMk id="9" creationId="{8BED72C4-7D5D-4A8A-BDCF-CE8452DF665A}"/>
-          </ac:picMkLst>
-        </pc:picChg>
-        <pc:picChg chg="del">
-          <ac:chgData name="Zhang, Aiyin" userId="6984d0e4-55fb-4bdb-aa49-e04b2dfb6feb" providerId="ADAL" clId="{5B75A0BE-F550-4DA7-ADD9-C5D08B16DEF0}" dt="2026-09-29T21:22:58.906" v="87" actId="478"/>
-          <ac:picMkLst>
-            <pc:docMk/>
-            <pc:sldMk cId="832248779" sldId="752"/>
-            <ac:picMk id="11" creationId="{763D9F93-DE81-4D40-947C-5D0B490A58E2}"/>
-          </ac:picMkLst>
-        </pc:picChg>
-        <pc:picChg chg="del">
-          <ac:chgData name="Zhang, Aiyin" userId="6984d0e4-55fb-4bdb-aa49-e04b2dfb6feb" providerId="ADAL" clId="{5B75A0BE-F550-4DA7-ADD9-C5D08B16DEF0}" dt="2026-09-29T21:22:58.906" v="87" actId="478"/>
-          <ac:picMkLst>
-            <pc:docMk/>
-            <pc:sldMk cId="832248779" sldId="752"/>
-            <ac:picMk id="19" creationId="{8CB8C8D9-37C8-4929-8D0D-C4A5CFF58B82}"/>
-          </ac:picMkLst>
-        </pc:picChg>
-        <pc:picChg chg="del">
-          <ac:chgData name="Zhang, Aiyin" userId="6984d0e4-55fb-4bdb-aa49-e04b2dfb6feb" providerId="ADAL" clId="{5B75A0BE-F550-4DA7-ADD9-C5D08B16DEF0}" dt="2026-09-29T21:22:58.906" v="87" actId="478"/>
-          <ac:picMkLst>
-            <pc:docMk/>
-            <pc:sldMk cId="832248779" sldId="752"/>
-            <ac:picMk id="20" creationId="{76AA288A-7329-41BE-AB38-BCA4C2C76A2A}"/>
-          </ac:picMkLst>
-        </pc:picChg>
         <pc:picChg chg="add del mod ord">
           <ac:chgData name="Zhang, Aiyin" userId="6984d0e4-55fb-4bdb-aa49-e04b2dfb6feb" providerId="ADAL" clId="{5B75A0BE-F550-4DA7-ADD9-C5D08B16DEF0}" dt="2026-09-30T04:17:50.896" v="128" actId="478"/>
           <ac:picMkLst>
@@ -1196,22 +1013,6 @@
             <ac:spMk id="20" creationId="{0F0545BC-8BB4-4587-A8E3-DEC22EB45D4B}"/>
           </ac:spMkLst>
         </pc:spChg>
-        <pc:spChg chg="add del mod">
-          <ac:chgData name="Zhang, Aiyin" userId="6984d0e4-55fb-4bdb-aa49-e04b2dfb6feb" providerId="ADAL" clId="{5B75A0BE-F550-4DA7-ADD9-C5D08B16DEF0}" dt="2026-09-29T20:48:33.255" v="24" actId="478"/>
-          <ac:spMkLst>
-            <pc:docMk/>
-            <pc:sldMk cId="27170180" sldId="753"/>
-            <ac:spMk id="29" creationId="{AF68BDCC-D1DD-4749-BD3E-41B0300FDC8D}"/>
-          </ac:spMkLst>
-        </pc:spChg>
-        <pc:spChg chg="add del mod">
-          <ac:chgData name="Zhang, Aiyin" userId="6984d0e4-55fb-4bdb-aa49-e04b2dfb6feb" providerId="ADAL" clId="{5B75A0BE-F550-4DA7-ADD9-C5D08B16DEF0}" dt="2026-09-29T20:48:44.224" v="27" actId="478"/>
-          <ac:spMkLst>
-            <pc:docMk/>
-            <pc:sldMk cId="27170180" sldId="753"/>
-            <ac:spMk id="30" creationId="{2C0E2208-290B-4F86-9034-25F5291B5655}"/>
-          </ac:spMkLst>
-        </pc:spChg>
         <pc:spChg chg="mod">
           <ac:chgData name="Zhang, Aiyin" userId="6984d0e4-55fb-4bdb-aa49-e04b2dfb6feb" providerId="ADAL" clId="{5B75A0BE-F550-4DA7-ADD9-C5D08B16DEF0}" dt="2026-09-29T20:48:33.679" v="25"/>
           <ac:spMkLst>
@@ -1260,30 +1061,6 @@
             <ac:spMk id="40" creationId="{2A8C0755-48BA-4FC6-B266-3D29CB24F137}"/>
           </ac:spMkLst>
         </pc:spChg>
-        <pc:grpChg chg="del mod">
-          <ac:chgData name="Zhang, Aiyin" userId="6984d0e4-55fb-4bdb-aa49-e04b2dfb6feb" providerId="ADAL" clId="{5B75A0BE-F550-4DA7-ADD9-C5D08B16DEF0}" dt="2026-09-29T20:48:33.255" v="24" actId="478"/>
-          <ac:grpSpMkLst>
-            <pc:docMk/>
-            <pc:sldMk cId="27170180" sldId="753"/>
-            <ac:grpSpMk id="5" creationId="{AE7C67A8-7799-41CD-A9C6-DEDBE5957AB7}"/>
-          </ac:grpSpMkLst>
-        </pc:grpChg>
-        <pc:grpChg chg="del mod">
-          <ac:chgData name="Zhang, Aiyin" userId="6984d0e4-55fb-4bdb-aa49-e04b2dfb6feb" providerId="ADAL" clId="{5B75A0BE-F550-4DA7-ADD9-C5D08B16DEF0}" dt="2026-09-29T20:48:33.255" v="24" actId="478"/>
-          <ac:grpSpMkLst>
-            <pc:docMk/>
-            <pc:sldMk cId="27170180" sldId="753"/>
-            <ac:grpSpMk id="6" creationId="{8E434F6F-1F04-4F74-A9E1-6873213619E6}"/>
-          </ac:grpSpMkLst>
-        </pc:grpChg>
-        <pc:grpChg chg="del mod">
-          <ac:chgData name="Zhang, Aiyin" userId="6984d0e4-55fb-4bdb-aa49-e04b2dfb6feb" providerId="ADAL" clId="{5B75A0BE-F550-4DA7-ADD9-C5D08B16DEF0}" dt="2026-09-29T20:48:33.255" v="24" actId="478"/>
-          <ac:grpSpMkLst>
-            <pc:docMk/>
-            <pc:sldMk cId="27170180" sldId="753"/>
-            <ac:grpSpMk id="26" creationId="{8FBF22D9-5E8A-40AB-9611-F44D540FCFAD}"/>
-          </ac:grpSpMkLst>
-        </pc:grpChg>
         <pc:grpChg chg="add mod">
           <ac:chgData name="Zhang, Aiyin" userId="6984d0e4-55fb-4bdb-aa49-e04b2dfb6feb" providerId="ADAL" clId="{5B75A0BE-F550-4DA7-ADD9-C5D08B16DEF0}" dt="2026-09-29T20:48:39.171" v="26" actId="1076"/>
           <ac:grpSpMkLst>
@@ -1314,101 +1091,6 @@
             <pc:docMk/>
             <pc:sldMk cId="27170180" sldId="753"/>
             <ac:picMk id="39" creationId="{5B8B6B7B-D898-45E1-A2D9-5096E489BC8E}"/>
-          </ac:picMkLst>
-        </pc:picChg>
-      </pc:sldChg>
-      <pc:sldChg chg="addSp delSp modSp add del mod">
-        <pc:chgData name="Zhang, Aiyin" userId="6984d0e4-55fb-4bdb-aa49-e04b2dfb6feb" providerId="ADAL" clId="{5B75A0BE-F550-4DA7-ADD9-C5D08B16DEF0}" dt="2026-09-29T20:53:14.288" v="68" actId="47"/>
-        <pc:sldMkLst>
-          <pc:docMk/>
-          <pc:sldMk cId="8706805" sldId="754"/>
-        </pc:sldMkLst>
-        <pc:spChg chg="mod">
-          <ac:chgData name="Zhang, Aiyin" userId="6984d0e4-55fb-4bdb-aa49-e04b2dfb6feb" providerId="ADAL" clId="{5B75A0BE-F550-4DA7-ADD9-C5D08B16DEF0}" dt="2026-09-29T20:49:27.436" v="34"/>
-          <ac:spMkLst>
-            <pc:docMk/>
-            <pc:sldMk cId="8706805" sldId="754"/>
-            <ac:spMk id="25" creationId="{07F3BAD4-41F7-41EA-BB71-7C618B058D14}"/>
-          </ac:spMkLst>
-        </pc:spChg>
-        <pc:spChg chg="mod">
-          <ac:chgData name="Zhang, Aiyin" userId="6984d0e4-55fb-4bdb-aa49-e04b2dfb6feb" providerId="ADAL" clId="{5B75A0BE-F550-4DA7-ADD9-C5D08B16DEF0}" dt="2026-09-29T20:49:27.436" v="34"/>
-          <ac:spMkLst>
-            <pc:docMk/>
-            <pc:sldMk cId="8706805" sldId="754"/>
-            <ac:spMk id="26" creationId="{15428FDF-F48C-4D33-9F24-087F42B1ED71}"/>
-          </ac:spMkLst>
-        </pc:spChg>
-        <pc:spChg chg="mod">
-          <ac:chgData name="Zhang, Aiyin" userId="6984d0e4-55fb-4bdb-aa49-e04b2dfb6feb" providerId="ADAL" clId="{5B75A0BE-F550-4DA7-ADD9-C5D08B16DEF0}" dt="2026-09-29T20:49:27.436" v="34"/>
-          <ac:spMkLst>
-            <pc:docMk/>
-            <pc:sldMk cId="8706805" sldId="754"/>
-            <ac:spMk id="27" creationId="{7484CCC5-BA46-4C82-A2F8-B997BC7D2688}"/>
-          </ac:spMkLst>
-        </pc:spChg>
-        <pc:spChg chg="mod">
-          <ac:chgData name="Zhang, Aiyin" userId="6984d0e4-55fb-4bdb-aa49-e04b2dfb6feb" providerId="ADAL" clId="{5B75A0BE-F550-4DA7-ADD9-C5D08B16DEF0}" dt="2026-09-29T20:49:27.436" v="34"/>
-          <ac:spMkLst>
-            <pc:docMk/>
-            <pc:sldMk cId="8706805" sldId="754"/>
-            <ac:spMk id="28" creationId="{5C54BAC5-51AF-47A4-BB58-7AA4B1D4316D}"/>
-          </ac:spMkLst>
-        </pc:spChg>
-        <pc:spChg chg="mod">
-          <ac:chgData name="Zhang, Aiyin" userId="6984d0e4-55fb-4bdb-aa49-e04b2dfb6feb" providerId="ADAL" clId="{5B75A0BE-F550-4DA7-ADD9-C5D08B16DEF0}" dt="2026-09-29T20:49:27.436" v="34"/>
-          <ac:spMkLst>
-            <pc:docMk/>
-            <pc:sldMk cId="8706805" sldId="754"/>
-            <ac:spMk id="29" creationId="{5F251FBA-E8A9-42FC-99F6-C387D94D53BF}"/>
-          </ac:spMkLst>
-        </pc:spChg>
-        <pc:spChg chg="mod">
-          <ac:chgData name="Zhang, Aiyin" userId="6984d0e4-55fb-4bdb-aa49-e04b2dfb6feb" providerId="ADAL" clId="{5B75A0BE-F550-4DA7-ADD9-C5D08B16DEF0}" dt="2026-09-29T20:49:27.436" v="34"/>
-          <ac:spMkLst>
-            <pc:docMk/>
-            <pc:sldMk cId="8706805" sldId="754"/>
-            <ac:spMk id="30" creationId="{7BC75ADC-9584-442A-8E6E-BBBFA864D407}"/>
-          </ac:spMkLst>
-        </pc:spChg>
-        <pc:grpChg chg="add mod">
-          <ac:chgData name="Zhang, Aiyin" userId="6984d0e4-55fb-4bdb-aa49-e04b2dfb6feb" providerId="ADAL" clId="{5B75A0BE-F550-4DA7-ADD9-C5D08B16DEF0}" dt="2026-09-29T20:49:27.436" v="34"/>
-          <ac:grpSpMkLst>
-            <pc:docMk/>
-            <pc:sldMk cId="8706805" sldId="754"/>
-            <ac:grpSpMk id="23" creationId="{0EAFDB74-C616-4066-9FCA-C25615A48C16}"/>
-          </ac:grpSpMkLst>
-        </pc:grpChg>
-        <pc:grpChg chg="del">
-          <ac:chgData name="Zhang, Aiyin" userId="6984d0e4-55fb-4bdb-aa49-e04b2dfb6feb" providerId="ADAL" clId="{5B75A0BE-F550-4DA7-ADD9-C5D08B16DEF0}" dt="2026-09-29T20:49:22.877" v="32" actId="478"/>
-          <ac:grpSpMkLst>
-            <pc:docMk/>
-            <pc:sldMk cId="8706805" sldId="754"/>
-            <ac:grpSpMk id="38" creationId="{367B2000-B098-4356-B15A-B9CFC3AD18F7}"/>
-          </ac:grpSpMkLst>
-        </pc:grpChg>
-        <pc:picChg chg="add mod">
-          <ac:chgData name="Zhang, Aiyin" userId="6984d0e4-55fb-4bdb-aa49-e04b2dfb6feb" providerId="ADAL" clId="{5B75A0BE-F550-4DA7-ADD9-C5D08B16DEF0}" dt="2026-09-29T20:49:27.436" v="34"/>
-          <ac:picMkLst>
-            <pc:docMk/>
-            <pc:sldMk cId="8706805" sldId="754"/>
-            <ac:picMk id="22" creationId="{89A637E2-A543-4345-BFD9-23E7B1A9154B}"/>
-          </ac:picMkLst>
-        </pc:picChg>
-        <pc:picChg chg="mod">
-          <ac:chgData name="Zhang, Aiyin" userId="6984d0e4-55fb-4bdb-aa49-e04b2dfb6feb" providerId="ADAL" clId="{5B75A0BE-F550-4DA7-ADD9-C5D08B16DEF0}" dt="2026-09-29T20:49:27.436" v="34"/>
-          <ac:picMkLst>
-            <pc:docMk/>
-            <pc:sldMk cId="8706805" sldId="754"/>
-            <ac:picMk id="24" creationId="{02AC2994-827C-47FB-B7A8-59D5F6C122D9}"/>
-          </ac:picMkLst>
-        </pc:picChg>
-        <pc:picChg chg="del">
-          <ac:chgData name="Zhang, Aiyin" userId="6984d0e4-55fb-4bdb-aa49-e04b2dfb6feb" providerId="ADAL" clId="{5B75A0BE-F550-4DA7-ADD9-C5D08B16DEF0}" dt="2026-09-29T20:49:27.044" v="33" actId="478"/>
-          <ac:picMkLst>
-            <pc:docMk/>
-            <pc:sldMk cId="8706805" sldId="754"/>
-            <ac:picMk id="36" creationId="{C55ECEDD-4B94-465B-82E0-EF5CFC83E4F6}"/>
           </ac:picMkLst>
         </pc:picChg>
       </pc:sldChg>
@@ -1464,126 +1146,6 @@
             <pc:docMk/>
             <pc:sldMk cId="623840585" sldId="755"/>
             <ac:spMk id="27" creationId="{2199B188-61C4-4855-B92E-F8B58A255666}"/>
-          </ac:spMkLst>
-        </pc:spChg>
-        <pc:spChg chg="mod">
-          <ac:chgData name="Zhang, Aiyin" userId="6984d0e4-55fb-4bdb-aa49-e04b2dfb6feb" providerId="ADAL" clId="{5B75A0BE-F550-4DA7-ADD9-C5D08B16DEF0}" dt="2026-09-29T20:51:21.716" v="39"/>
-          <ac:spMkLst>
-            <pc:docMk/>
-            <pc:sldMk cId="623840585" sldId="755"/>
-            <ac:spMk id="29" creationId="{D64480F2-E784-459B-927A-FC60E41E81AB}"/>
-          </ac:spMkLst>
-        </pc:spChg>
-        <pc:spChg chg="mod">
-          <ac:chgData name="Zhang, Aiyin" userId="6984d0e4-55fb-4bdb-aa49-e04b2dfb6feb" providerId="ADAL" clId="{5B75A0BE-F550-4DA7-ADD9-C5D08B16DEF0}" dt="2026-09-29T20:51:21.716" v="39"/>
-          <ac:spMkLst>
-            <pc:docMk/>
-            <pc:sldMk cId="623840585" sldId="755"/>
-            <ac:spMk id="30" creationId="{CF9E250D-6209-47A9-BE7A-0FAE4CE454EC}"/>
-          </ac:spMkLst>
-        </pc:spChg>
-        <pc:spChg chg="del">
-          <ac:chgData name="Zhang, Aiyin" userId="6984d0e4-55fb-4bdb-aa49-e04b2dfb6feb" providerId="ADAL" clId="{5B75A0BE-F550-4DA7-ADD9-C5D08B16DEF0}" dt="2026-09-29T20:52:21.939" v="56" actId="478"/>
-          <ac:spMkLst>
-            <pc:docMk/>
-            <pc:sldMk cId="623840585" sldId="755"/>
-            <ac:spMk id="34" creationId="{EE682658-F9D1-423F-9C87-D98E1FC768FE}"/>
-          </ac:spMkLst>
-        </pc:spChg>
-        <pc:spChg chg="del">
-          <ac:chgData name="Zhang, Aiyin" userId="6984d0e4-55fb-4bdb-aa49-e04b2dfb6feb" providerId="ADAL" clId="{5B75A0BE-F550-4DA7-ADD9-C5D08B16DEF0}" dt="2026-09-29T20:52:25.457" v="57" actId="478"/>
-          <ac:spMkLst>
-            <pc:docMk/>
-            <pc:sldMk cId="623840585" sldId="755"/>
-            <ac:spMk id="35" creationId="{59F3EF39-5021-480A-9ECD-0AEDEC585F5D}"/>
-          </ac:spMkLst>
-        </pc:spChg>
-        <pc:spChg chg="mod">
-          <ac:chgData name="Zhang, Aiyin" userId="6984d0e4-55fb-4bdb-aa49-e04b2dfb6feb" providerId="ADAL" clId="{5B75A0BE-F550-4DA7-ADD9-C5D08B16DEF0}" dt="2026-09-29T20:51:21.716" v="39"/>
-          <ac:spMkLst>
-            <pc:docMk/>
-            <pc:sldMk cId="623840585" sldId="755"/>
-            <ac:spMk id="41" creationId="{5A868AC7-03E3-495B-81E6-1F260D61F4EA}"/>
-          </ac:spMkLst>
-        </pc:spChg>
-        <pc:spChg chg="mod">
-          <ac:chgData name="Zhang, Aiyin" userId="6984d0e4-55fb-4bdb-aa49-e04b2dfb6feb" providerId="ADAL" clId="{5B75A0BE-F550-4DA7-ADD9-C5D08B16DEF0}" dt="2026-09-29T20:51:21.716" v="39"/>
-          <ac:spMkLst>
-            <pc:docMk/>
-            <pc:sldMk cId="623840585" sldId="755"/>
-            <ac:spMk id="42" creationId="{8833728F-823A-472E-A243-01F1261EA727}"/>
-          </ac:spMkLst>
-        </pc:spChg>
-        <pc:spChg chg="mod">
-          <ac:chgData name="Zhang, Aiyin" userId="6984d0e4-55fb-4bdb-aa49-e04b2dfb6feb" providerId="ADAL" clId="{5B75A0BE-F550-4DA7-ADD9-C5D08B16DEF0}" dt="2026-09-29T20:51:21.716" v="39"/>
-          <ac:spMkLst>
-            <pc:docMk/>
-            <pc:sldMk cId="623840585" sldId="755"/>
-            <ac:spMk id="43" creationId="{CF6F43AD-4320-477D-9D39-31DE159F66EC}"/>
-          </ac:spMkLst>
-        </pc:spChg>
-        <pc:spChg chg="mod">
-          <ac:chgData name="Zhang, Aiyin" userId="6984d0e4-55fb-4bdb-aa49-e04b2dfb6feb" providerId="ADAL" clId="{5B75A0BE-F550-4DA7-ADD9-C5D08B16DEF0}" dt="2026-09-29T20:51:21.716" v="39"/>
-          <ac:spMkLst>
-            <pc:docMk/>
-            <pc:sldMk cId="623840585" sldId="755"/>
-            <ac:spMk id="44" creationId="{BE8A7631-F0E9-4CB2-A8F8-9D3F15769D2B}"/>
-          </ac:spMkLst>
-        </pc:spChg>
-        <pc:spChg chg="mod">
-          <ac:chgData name="Zhang, Aiyin" userId="6984d0e4-55fb-4bdb-aa49-e04b2dfb6feb" providerId="ADAL" clId="{5B75A0BE-F550-4DA7-ADD9-C5D08B16DEF0}" dt="2026-09-29T20:51:28.760" v="43"/>
-          <ac:spMkLst>
-            <pc:docMk/>
-            <pc:sldMk cId="623840585" sldId="755"/>
-            <ac:spMk id="47" creationId="{47900FF4-362E-44F2-A638-3932A3AA9C2B}"/>
-          </ac:spMkLst>
-        </pc:spChg>
-        <pc:spChg chg="mod">
-          <ac:chgData name="Zhang, Aiyin" userId="6984d0e4-55fb-4bdb-aa49-e04b2dfb6feb" providerId="ADAL" clId="{5B75A0BE-F550-4DA7-ADD9-C5D08B16DEF0}" dt="2026-09-29T20:51:28.760" v="43"/>
-          <ac:spMkLst>
-            <pc:docMk/>
-            <pc:sldMk cId="623840585" sldId="755"/>
-            <ac:spMk id="48" creationId="{A6CC73B1-413F-4407-A8F3-CF5ACEB0BD90}"/>
-          </ac:spMkLst>
-        </pc:spChg>
-        <pc:spChg chg="mod">
-          <ac:chgData name="Zhang, Aiyin" userId="6984d0e4-55fb-4bdb-aa49-e04b2dfb6feb" providerId="ADAL" clId="{5B75A0BE-F550-4DA7-ADD9-C5D08B16DEF0}" dt="2026-09-29T20:51:28.760" v="43"/>
-          <ac:spMkLst>
-            <pc:docMk/>
-            <pc:sldMk cId="623840585" sldId="755"/>
-            <ac:spMk id="49" creationId="{AAEE82B7-022F-4732-ACEA-DF0F82E80D05}"/>
-          </ac:spMkLst>
-        </pc:spChg>
-        <pc:spChg chg="mod">
-          <ac:chgData name="Zhang, Aiyin" userId="6984d0e4-55fb-4bdb-aa49-e04b2dfb6feb" providerId="ADAL" clId="{5B75A0BE-F550-4DA7-ADD9-C5D08B16DEF0}" dt="2026-09-29T20:51:28.760" v="43"/>
-          <ac:spMkLst>
-            <pc:docMk/>
-            <pc:sldMk cId="623840585" sldId="755"/>
-            <ac:spMk id="50" creationId="{08FE8B9E-D678-476B-ABFE-E5C6DE3653FC}"/>
-          </ac:spMkLst>
-        </pc:spChg>
-        <pc:spChg chg="mod">
-          <ac:chgData name="Zhang, Aiyin" userId="6984d0e4-55fb-4bdb-aa49-e04b2dfb6feb" providerId="ADAL" clId="{5B75A0BE-F550-4DA7-ADD9-C5D08B16DEF0}" dt="2026-09-29T20:51:28.760" v="43"/>
-          <ac:spMkLst>
-            <pc:docMk/>
-            <pc:sldMk cId="623840585" sldId="755"/>
-            <ac:spMk id="51" creationId="{579FF8D3-2572-4BD4-A7BD-8B1E22343A0C}"/>
-          </ac:spMkLst>
-        </pc:spChg>
-        <pc:spChg chg="mod">
-          <ac:chgData name="Zhang, Aiyin" userId="6984d0e4-55fb-4bdb-aa49-e04b2dfb6feb" providerId="ADAL" clId="{5B75A0BE-F550-4DA7-ADD9-C5D08B16DEF0}" dt="2026-09-29T20:51:28.760" v="43"/>
-          <ac:spMkLst>
-            <pc:docMk/>
-            <pc:sldMk cId="623840585" sldId="755"/>
-            <ac:spMk id="52" creationId="{552E3365-1876-4489-B411-EA619214E5AC}"/>
-          </ac:spMkLst>
-        </pc:spChg>
-        <pc:spChg chg="del mod">
-          <ac:chgData name="Zhang, Aiyin" userId="6984d0e4-55fb-4bdb-aa49-e04b2dfb6feb" providerId="ADAL" clId="{5B75A0BE-F550-4DA7-ADD9-C5D08B16DEF0}" dt="2026-09-29T20:52:07.246" v="55" actId="478"/>
-          <ac:spMkLst>
-            <pc:docMk/>
-            <pc:sldMk cId="623840585" sldId="755"/>
-            <ac:spMk id="55" creationId="{46ADE22F-27A5-4987-9333-5DC1D7F07932}"/>
           </ac:spMkLst>
         </pc:spChg>
         <pc:spChg chg="mod">
@@ -1770,28 +1332,12 @@
             <ac:grpSpMk id="18" creationId="{C7BABAB5-08B7-4059-BE88-C4E7D914B955}"/>
           </ac:grpSpMkLst>
         </pc:grpChg>
-        <pc:grpChg chg="add del mod">
-          <ac:chgData name="Zhang, Aiyin" userId="6984d0e4-55fb-4bdb-aa49-e04b2dfb6feb" providerId="ADAL" clId="{5B75A0BE-F550-4DA7-ADD9-C5D08B16DEF0}" dt="2026-09-29T20:51:27.778" v="42"/>
-          <ac:grpSpMkLst>
-            <pc:docMk/>
-            <pc:sldMk cId="623840585" sldId="755"/>
-            <ac:grpSpMk id="28" creationId="{9B118F4C-7472-4D12-877A-17455813EB32}"/>
-          </ac:grpSpMkLst>
-        </pc:grpChg>
         <pc:grpChg chg="mod">
           <ac:chgData name="Zhang, Aiyin" userId="6984d0e4-55fb-4bdb-aa49-e04b2dfb6feb" providerId="ADAL" clId="{5B75A0BE-F550-4DA7-ADD9-C5D08B16DEF0}" dt="2026-09-29T20:52:59.808" v="60" actId="1076"/>
           <ac:grpSpMkLst>
             <pc:docMk/>
             <pc:sldMk cId="623840585" sldId="755"/>
             <ac:grpSpMk id="31" creationId="{7C0683BC-36A0-4129-A166-E078AEE738ED}"/>
-          </ac:grpSpMkLst>
-        </pc:grpChg>
-        <pc:grpChg chg="add del mod">
-          <ac:chgData name="Zhang, Aiyin" userId="6984d0e4-55fb-4bdb-aa49-e04b2dfb6feb" providerId="ADAL" clId="{5B75A0BE-F550-4DA7-ADD9-C5D08B16DEF0}" dt="2026-09-29T20:51:35.153" v="48"/>
-          <ac:grpSpMkLst>
-            <pc:docMk/>
-            <pc:sldMk cId="623840585" sldId="755"/>
-            <ac:grpSpMk id="46" creationId="{4880CC24-74EF-4EE4-B9F4-7A3DBACFD467}"/>
           </ac:grpSpMkLst>
         </pc:grpChg>
         <pc:grpChg chg="add mod">
@@ -1842,36 +1388,12 @@
             <ac:grpSpMk id="72" creationId="{E7020129-EF0C-4172-878E-EC8BD6CD34A4}"/>
           </ac:grpSpMkLst>
         </pc:grpChg>
-        <pc:picChg chg="add del mod">
-          <ac:chgData name="Zhang, Aiyin" userId="6984d0e4-55fb-4bdb-aa49-e04b2dfb6feb" providerId="ADAL" clId="{5B75A0BE-F550-4DA7-ADD9-C5D08B16DEF0}" dt="2026-09-29T20:50:49.709" v="38" actId="478"/>
-          <ac:picMkLst>
-            <pc:docMk/>
-            <pc:sldMk cId="623840585" sldId="755"/>
-            <ac:picMk id="22" creationId="{76836F77-9214-4AE7-A670-7291F2DEAF92}"/>
-          </ac:picMkLst>
-        </pc:picChg>
         <pc:picChg chg="mod">
           <ac:chgData name="Zhang, Aiyin" userId="6984d0e4-55fb-4bdb-aa49-e04b2dfb6feb" providerId="ADAL" clId="{5B75A0BE-F550-4DA7-ADD9-C5D08B16DEF0}" dt="2026-09-29T20:51:31.560" v="45" actId="1076"/>
           <ac:picMkLst>
             <pc:docMk/>
             <pc:sldMk cId="623840585" sldId="755"/>
             <ac:picMk id="36" creationId="{C55ECEDD-4B94-465B-82E0-EF5CFC83E4F6}"/>
-          </ac:picMkLst>
-        </pc:picChg>
-        <pc:picChg chg="add mod">
-          <ac:chgData name="Zhang, Aiyin" userId="6984d0e4-55fb-4bdb-aa49-e04b2dfb6feb" providerId="ADAL" clId="{5B75A0BE-F550-4DA7-ADD9-C5D08B16DEF0}" dt="2026-09-29T20:51:26.778" v="41" actId="571"/>
-          <ac:picMkLst>
-            <pc:docMk/>
-            <pc:sldMk cId="623840585" sldId="755"/>
-            <ac:picMk id="45" creationId="{9D125784-7A85-4513-8AFD-D2111BCD3F5A}"/>
-          </ac:picMkLst>
-        </pc:picChg>
-        <pc:picChg chg="add mod">
-          <ac:chgData name="Zhang, Aiyin" userId="6984d0e4-55fb-4bdb-aa49-e04b2dfb6feb" providerId="ADAL" clId="{5B75A0BE-F550-4DA7-ADD9-C5D08B16DEF0}" dt="2026-09-29T20:51:34.757" v="47" actId="571"/>
-          <ac:picMkLst>
-            <pc:docMk/>
-            <pc:sldMk cId="623840585" sldId="755"/>
-            <ac:picMk id="53" creationId="{C4B8C2C1-FC95-4C15-90C2-EC18915ADAA6}"/>
           </ac:picMkLst>
         </pc:picChg>
         <pc:picChg chg="add mod">
@@ -1945,14 +1467,6 @@
             <ac:grpSpMk id="8" creationId="{473960BE-A260-4248-A98E-4C735B021424}"/>
           </ac:grpSpMkLst>
         </pc:grpChg>
-        <pc:picChg chg="del">
-          <ac:chgData name="Zhang, Aiyin" userId="6984d0e4-55fb-4bdb-aa49-e04b2dfb6feb" providerId="ADAL" clId="{5B75A0BE-F550-4DA7-ADD9-C5D08B16DEF0}" dt="2026-09-29T20:57:43.095" v="84" actId="478"/>
-          <ac:picMkLst>
-            <pc:docMk/>
-            <pc:sldMk cId="922690811" sldId="756"/>
-            <ac:picMk id="6" creationId="{5A5B9DA4-83C1-4257-AF17-3F029ADEA33A}"/>
-          </ac:picMkLst>
-        </pc:picChg>
         <pc:picChg chg="mod">
           <ac:chgData name="Zhang, Aiyin" userId="6984d0e4-55fb-4bdb-aa49-e04b2dfb6feb" providerId="ADAL" clId="{5B75A0BE-F550-4DA7-ADD9-C5D08B16DEF0}" dt="2026-09-30T04:16:50.374" v="103" actId="1076"/>
           <ac:picMkLst>
@@ -2276,7 +1790,7 @@
           <a:p>
             <a:fld id="{AE7E7607-5240-41BF-B925-07982936DD72}" type="datetimeFigureOut">
               <a:rPr lang="en-US" smtClean="0"/>
-              <a:t>9/30/2026</a:t>
+              <a:t>10/1/2026</a:t>
             </a:fld>
             <a:endParaRPr lang="en-US"/>
           </a:p>
@@ -4135,7 +3649,7 @@
           <a:p>
             <a:fld id="{0D3CC98B-EB0F-4D54-8BB8-E3E4CB5B58F4}" type="datetime1">
               <a:rPr lang="en-US" smtClean="0"/>
-              <a:t>9/30/2026</a:t>
+              <a:t>10/1/2026</a:t>
             </a:fld>
             <a:endParaRPr lang="en-US"/>
           </a:p>
@@ -4333,7 +3847,7 @@
           <a:p>
             <a:fld id="{6AD25A78-EF44-4583-9176-B695BFEE3A66}" type="datetime1">
               <a:rPr lang="en-US" smtClean="0"/>
-              <a:t>9/30/2026</a:t>
+              <a:t>10/1/2026</a:t>
             </a:fld>
             <a:endParaRPr lang="en-US"/>
           </a:p>
@@ -4541,7 +4055,7 @@
           <a:p>
             <a:fld id="{C18C66FF-3AAD-4DA4-B648-42034EAE0AD9}" type="datetime1">
               <a:rPr lang="en-US" smtClean="0"/>
-              <a:t>9/30/2026</a:t>
+              <a:t>10/1/2026</a:t>
             </a:fld>
             <a:endParaRPr lang="en-US"/>
           </a:p>
@@ -4880,7 +4394,7 @@
           <a:p>
             <a:fld id="{247F24EE-30C3-4903-9708-31BA15836EFF}" type="datetime1">
               <a:rPr lang="en-US" smtClean="0"/>
-              <a:t>9/30/2026</a:t>
+              <a:t>10/1/2026</a:t>
             </a:fld>
             <a:endParaRPr lang="en-US"/>
           </a:p>
@@ -5155,7 +4669,7 @@
           <a:p>
             <a:fld id="{B4CEA07A-9A95-4DEE-88E4-56680CDA3F37}" type="datetime1">
               <a:rPr lang="en-US" smtClean="0"/>
-              <a:t>9/30/2026</a:t>
+              <a:t>10/1/2026</a:t>
             </a:fld>
             <a:endParaRPr lang="en-US"/>
           </a:p>
@@ -5420,7 +4934,7 @@
           <a:p>
             <a:fld id="{D438DEEE-6AEE-4106-8D96-12C3D974F3A2}" type="datetime1">
               <a:rPr lang="en-US" smtClean="0"/>
-              <a:t>9/30/2026</a:t>
+              <a:t>10/1/2026</a:t>
             </a:fld>
             <a:endParaRPr lang="en-US"/>
           </a:p>
@@ -5832,7 +5346,7 @@
           <a:p>
             <a:fld id="{D93A40F5-7C0B-4D35-B606-BF52E6121831}" type="datetime1">
               <a:rPr lang="en-US" smtClean="0"/>
-              <a:t>9/30/2026</a:t>
+              <a:t>10/1/2026</a:t>
             </a:fld>
             <a:endParaRPr lang="en-US"/>
           </a:p>
@@ -5973,7 +5487,7 @@
           <a:p>
             <a:fld id="{314F0234-42B9-478F-A0E4-D0D7D6B9E697}" type="datetime1">
               <a:rPr lang="en-US" smtClean="0"/>
-              <a:t>9/30/2026</a:t>
+              <a:t>10/1/2026</a:t>
             </a:fld>
             <a:endParaRPr lang="en-US"/>
           </a:p>
@@ -6086,7 +5600,7 @@
           <a:p>
             <a:fld id="{01E8425F-FFDA-46DA-9124-8CF5E4B9B39E}" type="datetime1">
               <a:rPr lang="en-US" smtClean="0"/>
-              <a:t>9/30/2026</a:t>
+              <a:t>10/1/2026</a:t>
             </a:fld>
             <a:endParaRPr lang="en-US"/>
           </a:p>
@@ -6397,7 +5911,7 @@
           <a:p>
             <a:fld id="{08D38C61-90F0-40D9-8BB1-EF923A602082}" type="datetime1">
               <a:rPr lang="en-US" smtClean="0"/>
-              <a:t>9/30/2026</a:t>
+              <a:t>10/1/2026</a:t>
             </a:fld>
             <a:endParaRPr lang="en-US"/>
           </a:p>
@@ -6685,7 +6199,7 @@
           <a:p>
             <a:fld id="{F5EA4B98-E334-480B-84BF-BAECDBE84A4B}" type="datetime1">
               <a:rPr lang="en-US" smtClean="0"/>
-              <a:t>9/30/2026</a:t>
+              <a:t>10/1/2026</a:t>
             </a:fld>
             <a:endParaRPr lang="en-US"/>
           </a:p>
@@ -6926,7 +6440,7 @@
           <a:p>
             <a:fld id="{D252FA85-13F1-4739-A691-BA2D2E4289B9}" type="datetime1">
               <a:rPr lang="en-US" smtClean="0"/>
-              <a:t>9/30/2026</a:t>
+              <a:t>10/1/2026</a:t>
             </a:fld>
             <a:endParaRPr lang="en-US"/>
           </a:p>
@@ -24530,15 +24044,6 @@
 </file>
 
 <file path=customXml/item2.xml><?xml version="1.0" encoding="utf-8"?>
-<?mso-contentType ?>
-<FormTemplates xmlns="http://schemas.microsoft.com/sharepoint/v3/contenttype/forms">
-  <Display>DocumentLibraryForm</Display>
-  <Edit>DocumentLibraryForm</Edit>
-  <New>DocumentLibraryForm</New>
-</FormTemplates>
-</file>
-
-<file path=customXml/item3.xml><?xml version="1.0" encoding="utf-8"?>
 <ct:contentTypeSchema xmlns:ct="http://schemas.microsoft.com/office/2006/metadata/contentType" xmlns:ma="http://schemas.microsoft.com/office/2006/metadata/properties/metaAttributes" ct:_="" ma:_="" ma:contentTypeName="Document" ma:contentTypeID="0x010100DB4CBB89BD7D6445BB7F862D8899099E" ma:contentTypeVersion="18" ma:contentTypeDescription="Create a new document." ma:contentTypeScope="" ma:versionID="2b3be570f71b7d62e7132c7eced99c6f">
   <xsd:schema xmlns:xsd="http://www.w3.org/2001/XMLSchema" xmlns:xs="http://www.w3.org/2001/XMLSchema" xmlns:p="http://schemas.microsoft.com/office/2006/metadata/properties" xmlns:ns3="b70da884-86bb-4f87-bb7b-c87fdd365207" xmlns:ns4="e8ea0c43-9cc4-434f-8c4f-3f30e817cc6a" targetNamespace="http://schemas.microsoft.com/office/2006/metadata/properties" ma:root="true" ma:fieldsID="86625aee51aae36b45c39a0385e969ff" ns3:_="" ns4:_="">
     <xsd:import namespace="b70da884-86bb-4f87-bb7b-c87fdd365207"/>
@@ -24791,6 +24296,15 @@
 </ct:contentTypeSchema>
 </file>
 
+<file path=customXml/item3.xml><?xml version="1.0" encoding="utf-8"?>
+<?mso-contentType ?>
+<FormTemplates xmlns="http://schemas.microsoft.com/sharepoint/v3/contenttype/forms">
+  <Display>DocumentLibraryForm</Display>
+  <Edit>DocumentLibraryForm</Edit>
+  <New>DocumentLibraryForm</New>
+</FormTemplates>
+</file>
+
 <file path=customXml/itemProps1.xml><?xml version="1.0" encoding="utf-8"?>
 <ds:datastoreItem xmlns:ds="http://schemas.openxmlformats.org/officeDocument/2006/customXml" ds:itemID="{8A5F1F33-C96A-467A-97C7-119A58A3A67E}">
   <ds:schemaRefs>
@@ -24809,14 +24323,6 @@
 </file>
 
 <file path=customXml/itemProps2.xml><?xml version="1.0" encoding="utf-8"?>
-<ds:datastoreItem xmlns:ds="http://schemas.openxmlformats.org/officeDocument/2006/customXml" ds:itemID="{4B847C2B-ACB2-4F0E-BBEB-402672B88F8E}">
-  <ds:schemaRefs>
-    <ds:schemaRef ds:uri="http://schemas.microsoft.com/sharepoint/v3/contenttype/forms"/>
-  </ds:schemaRefs>
-</ds:datastoreItem>
-</file>
-
-<file path=customXml/itemProps3.xml><?xml version="1.0" encoding="utf-8"?>
 <ds:datastoreItem xmlns:ds="http://schemas.openxmlformats.org/officeDocument/2006/customXml" ds:itemID="{D4DF304E-AA82-4B25-B5D7-ECE40D9A4C76}">
   <ds:schemaRefs>
     <ds:schemaRef ds:uri="http://schemas.microsoft.com/office/2006/metadata/contentType"/>
@@ -24833,4 +24339,12 @@
     <ds:schemaRef ds:uri="http://schemas.microsoft.com/internal/obd"/>
   </ds:schemaRefs>
 </ds:datastoreItem>
+</file>
+
+<file path=customXml/itemProps3.xml><?xml version="1.0" encoding="utf-8"?>
+<ds:datastoreItem xmlns:ds="http://schemas.openxmlformats.org/officeDocument/2006/customXml" ds:itemID="{4B847C2B-ACB2-4F0E-BBEB-402672B88F8E}">
+  <ds:schemaRefs>
+    <ds:schemaRef ds:uri="http://schemas.microsoft.com/sharepoint/v3/contenttype/forms"/>
+  </ds:schemaRefs>
+</ds:datastoreItem>
 </file>